--- a/public/lessons/year-6-maths/spring/week-20/apply-spring-reasoning/teaching-powerpoint-v1.pptx
+++ b/public/lessons/year-6-maths/spring/week-20/apply-spring-reasoning/teaching-powerpoint-v1.pptx
@@ -2,24 +2,24 @@
 <file path=ppt/presentation.xml><?xml version="1.0" encoding="utf-8"?>
 <p:presentation xmlns:p="http://schemas.openxmlformats.org/presentationml/2006/main">
   <p:sldMasterIdLst>
-    <p:sldMasterId xmlns:r="http://schemas.openxmlformats.org/officeDocument/2006/relationships" id="2147483648" r:id="R6f80623a19bb4267"/>
+    <p:sldMasterId xmlns:r="http://schemas.openxmlformats.org/officeDocument/2006/relationships" id="2147483648" r:id="Raf08349faf9e4503"/>
   </p:sldMasterIdLst>
   <p:notesMasterIdLst>
-    <p:notesMasterId xmlns:r="http://schemas.openxmlformats.org/officeDocument/2006/relationships" r:id="R76154f41119d4a7f"/>
+    <p:notesMasterId xmlns:r="http://schemas.openxmlformats.org/officeDocument/2006/relationships" r:id="Rc27f800841c04c7a"/>
   </p:notesMasterIdLst>
   <p:sldIdLst>
-    <p:sldId xmlns:r="http://schemas.openxmlformats.org/officeDocument/2006/relationships" id="256" r:id="Rde04e906fcd84058"/>
-    <p:sldId xmlns:r="http://schemas.openxmlformats.org/officeDocument/2006/relationships" id="257" r:id="Rabd4ffca4dbd4941"/>
-    <p:sldId xmlns:r="http://schemas.openxmlformats.org/officeDocument/2006/relationships" id="258" r:id="R2ab61e2919bc46ba"/>
-    <p:sldId xmlns:r="http://schemas.openxmlformats.org/officeDocument/2006/relationships" id="259" r:id="R6fa9b9b0042e4120"/>
-    <p:sldId xmlns:r="http://schemas.openxmlformats.org/officeDocument/2006/relationships" id="260" r:id="Re1529429ca114d45"/>
-    <p:sldId xmlns:r="http://schemas.openxmlformats.org/officeDocument/2006/relationships" id="261" r:id="R8aee5a6fc09f48e2"/>
-    <p:sldId xmlns:r="http://schemas.openxmlformats.org/officeDocument/2006/relationships" id="262" r:id="R10a2d3a6a36d406c"/>
-    <p:sldId xmlns:r="http://schemas.openxmlformats.org/officeDocument/2006/relationships" id="263" r:id="R9896e93127fe44b7"/>
-    <p:sldId xmlns:r="http://schemas.openxmlformats.org/officeDocument/2006/relationships" id="264" r:id="Re6112482d8124faf"/>
-    <p:sldId xmlns:r="http://schemas.openxmlformats.org/officeDocument/2006/relationships" id="265" r:id="R3d628d8992d448df"/>
-    <p:sldId xmlns:r="http://schemas.openxmlformats.org/officeDocument/2006/relationships" id="266" r:id="Rd616d25910384d33"/>
-    <p:sldId xmlns:r="http://schemas.openxmlformats.org/officeDocument/2006/relationships" id="267" r:id="R980118f6d73142e1"/>
+    <p:sldId xmlns:r="http://schemas.openxmlformats.org/officeDocument/2006/relationships" id="256" r:id="R3cd39937d03846e4"/>
+    <p:sldId xmlns:r="http://schemas.openxmlformats.org/officeDocument/2006/relationships" id="257" r:id="R852de05cd05c4963"/>
+    <p:sldId xmlns:r="http://schemas.openxmlformats.org/officeDocument/2006/relationships" id="258" r:id="R8d2156265ad140f6"/>
+    <p:sldId xmlns:r="http://schemas.openxmlformats.org/officeDocument/2006/relationships" id="259" r:id="R1841d45c5bdd4b1f"/>
+    <p:sldId xmlns:r="http://schemas.openxmlformats.org/officeDocument/2006/relationships" id="260" r:id="R665fae54346044b4"/>
+    <p:sldId xmlns:r="http://schemas.openxmlformats.org/officeDocument/2006/relationships" id="261" r:id="Rd3adcce8195b43a2"/>
+    <p:sldId xmlns:r="http://schemas.openxmlformats.org/officeDocument/2006/relationships" id="262" r:id="Rcb05cd48d9914e24"/>
+    <p:sldId xmlns:r="http://schemas.openxmlformats.org/officeDocument/2006/relationships" id="263" r:id="R05aa7eb27e254808"/>
+    <p:sldId xmlns:r="http://schemas.openxmlformats.org/officeDocument/2006/relationships" id="264" r:id="Rf219244003e84ea6"/>
+    <p:sldId xmlns:r="http://schemas.openxmlformats.org/officeDocument/2006/relationships" id="265" r:id="R02e7399dde9549ff"/>
+    <p:sldId xmlns:r="http://schemas.openxmlformats.org/officeDocument/2006/relationships" id="266" r:id="R4495623e184e46ee"/>
+    <p:sldId xmlns:r="http://schemas.openxmlformats.org/officeDocument/2006/relationships" id="267" r:id="Rfc8ade3385fb4f03"/>
   </p:sldIdLst>
   <p:sldSz cx="12192000" cy="6858000"/>
   <p:notesSz cx="6858000" cy="9144000"/>
@@ -873,7 +873,7 @@
           <a:lstStyle xmlns:a="http://schemas.openxmlformats.org/drawingml/2006/main"/>
           <a:p xmlns:a="http://schemas.openxmlformats.org/drawingml/2006/main">
             <a:r>
-              <a:t>I do. Reveal the question, setup and each calculation stage one click at a time. Pupils watch before copying. Model answer: 1 3/4 kg.</a:t>
+              <a:t>I do. Reveal the question, then reveal each mathematical change one click at a time. Point to the numbers and operation that changed before moving to the next line. Final answer: 1 3/4 kg.</a:t>
             </a:r>
           </a:p>
         </p:txBody>
@@ -1291,7 +1291,7 @@
   </p:cSld>
   <p:clrMap bg1="lt1" tx1="dk1" bg2="lt2" tx2="dk2" accent1="accent1" accent2="accent2" accent3="accent3" accent4="accent4" accent5="accent5" accent6="accent6" hlink="hlink" folHlink="folHlink"/>
   <p:sldLayoutIdLst>
-    <p:sldLayoutId xmlns:r="http://schemas.openxmlformats.org/officeDocument/2006/relationships" id="2147483649" r:id="R1ef8d9a3c206496e"/>
+    <p:sldLayoutId xmlns:r="http://schemas.openxmlformats.org/officeDocument/2006/relationships" id="2147483649" r:id="Rda13041e3f224c5a"/>
   </p:sldLayoutIdLst>
   <p:txStyles>
     <p:titleStyle>
@@ -1842,7 +1842,7 @@
           <p:cNvPr id="12" name="">
             <a:extLst xmlns:a="http://schemas.openxmlformats.org/drawingml/2006/main">
               <a:ext uri="{FF2B5EF4-FFF2-40B4-BE49-F238E27FC236}">
-                <a16:creationId xmlns:a16="http://schemas.microsoft.com/office/drawing/2014/main" id="{AB64B1A7-DD73-40FD-9FA5-3A181B12F0FB}"/>
+                <a16:creationId xmlns:a16="http://schemas.microsoft.com/office/drawing/2014/main" id="{2C93A9D1-8E38-4B5E-BF96-1703FB001F62}"/>
               </a:ext>
             </a:extLst>
           </p:cNvPr>
@@ -1874,7 +1874,7 @@
           <p:cNvPr id="2" name="">
             <a:extLst xmlns:a="http://schemas.openxmlformats.org/drawingml/2006/main">
               <a:ext uri="{FF2B5EF4-FFF2-40B4-BE49-F238E27FC236}">
-                <a16:creationId xmlns:a16="http://schemas.microsoft.com/office/drawing/2014/main" id="{3AA38157-EA4E-405B-AE41-4DA8E49D4B2B}"/>
+                <a16:creationId xmlns:a16="http://schemas.microsoft.com/office/drawing/2014/main" id="{251E40C9-1097-4264-9A70-66E5D60AAD9C}"/>
               </a:ext>
             </a:extLst>
           </p:cNvPr>
@@ -1931,7 +1931,7 @@
           <p:cNvPr id="3" name="">
             <a:extLst xmlns:a="http://schemas.openxmlformats.org/drawingml/2006/main">
               <a:ext uri="{FF2B5EF4-FFF2-40B4-BE49-F238E27FC236}">
-                <a16:creationId xmlns:a16="http://schemas.microsoft.com/office/drawing/2014/main" id="{16B30981-23DD-4809-B0CE-B31B9805B905}"/>
+                <a16:creationId xmlns:a16="http://schemas.microsoft.com/office/drawing/2014/main" id="{C4AEB579-0247-41D9-B298-A4F772C6E596}"/>
               </a:ext>
             </a:extLst>
           </p:cNvPr>
@@ -1965,7 +1965,7 @@
           <p:cNvPr id="4" name="">
             <a:extLst xmlns:a="http://schemas.openxmlformats.org/drawingml/2006/main">
               <a:ext uri="{FF2B5EF4-FFF2-40B4-BE49-F238E27FC236}">
-                <a16:creationId xmlns:a16="http://schemas.microsoft.com/office/drawing/2014/main" id="{D04470ED-D17D-46C6-A62F-1C59CD7AC583}"/>
+                <a16:creationId xmlns:a16="http://schemas.microsoft.com/office/drawing/2014/main" id="{EC55F80F-FDBE-49CE-BCAC-98F7C08BFC68}"/>
               </a:ext>
             </a:extLst>
           </p:cNvPr>
@@ -2022,7 +2022,7 @@
           <p:cNvPr id="5" name="">
             <a:extLst xmlns:a="http://schemas.openxmlformats.org/drawingml/2006/main">
               <a:ext uri="{FF2B5EF4-FFF2-40B4-BE49-F238E27FC236}">
-                <a16:creationId xmlns:a16="http://schemas.microsoft.com/office/drawing/2014/main" id="{F263C5D8-A0CE-4ABD-978F-7B0AD2D151CA}"/>
+                <a16:creationId xmlns:a16="http://schemas.microsoft.com/office/drawing/2014/main" id="{F1879A60-C5F1-4FB1-A81A-2207B53DA697}"/>
               </a:ext>
             </a:extLst>
           </p:cNvPr>
@@ -2079,7 +2079,7 @@
           <p:cNvPr id="6" name="">
             <a:extLst xmlns:a="http://schemas.openxmlformats.org/drawingml/2006/main">
               <a:ext uri="{FF2B5EF4-FFF2-40B4-BE49-F238E27FC236}">
-                <a16:creationId xmlns:a16="http://schemas.microsoft.com/office/drawing/2014/main" id="{49D632B8-FBDE-4B31-ABDA-3CD5367D02FB}"/>
+                <a16:creationId xmlns:a16="http://schemas.microsoft.com/office/drawing/2014/main" id="{1C5C0FD8-FEFA-45A2-8408-961DC3AEB3BF}"/>
               </a:ext>
             </a:extLst>
           </p:cNvPr>
@@ -2113,7 +2113,7 @@
           <p:cNvPr id="7" name="">
             <a:extLst xmlns:a="http://schemas.openxmlformats.org/drawingml/2006/main">
               <a:ext uri="{FF2B5EF4-FFF2-40B4-BE49-F238E27FC236}">
-                <a16:creationId xmlns:a16="http://schemas.microsoft.com/office/drawing/2014/main" id="{21D2F592-6FCD-4B47-AF8D-22C5D3361900}"/>
+                <a16:creationId xmlns:a16="http://schemas.microsoft.com/office/drawing/2014/main" id="{CCEA2CB1-C019-4201-BBD2-CBF36A4A4BC9}"/>
               </a:ext>
             </a:extLst>
           </p:cNvPr>
@@ -2170,7 +2170,7 @@
           <p:cNvPr id="8" name="">
             <a:extLst xmlns:a="http://schemas.openxmlformats.org/drawingml/2006/main">
               <a:ext uri="{FF2B5EF4-FFF2-40B4-BE49-F238E27FC236}">
-                <a16:creationId xmlns:a16="http://schemas.microsoft.com/office/drawing/2014/main" id="{1F51398A-3C89-4B2A-B22A-DDF0B4CE675E}"/>
+                <a16:creationId xmlns:a16="http://schemas.microsoft.com/office/drawing/2014/main" id="{F4E39E21-416E-4A49-BC8F-7D4EBF7E729A}"/>
               </a:ext>
             </a:extLst>
           </p:cNvPr>
@@ -2227,7 +2227,7 @@
           <p:cNvPr id="9" name="">
             <a:extLst xmlns:a="http://schemas.openxmlformats.org/drawingml/2006/main">
               <a:ext uri="{FF2B5EF4-FFF2-40B4-BE49-F238E27FC236}">
-                <a16:creationId xmlns:a16="http://schemas.microsoft.com/office/drawing/2014/main" id="{AE8B4AB6-C214-4D77-8660-A200D13655D7}"/>
+                <a16:creationId xmlns:a16="http://schemas.microsoft.com/office/drawing/2014/main" id="{17F2156F-5DE8-48FB-9E2A-FD046CA224CD}"/>
               </a:ext>
             </a:extLst>
           </p:cNvPr>
@@ -2284,7 +2284,7 @@
           <p:cNvPr id="10" name="">
             <a:extLst xmlns:a="http://schemas.openxmlformats.org/drawingml/2006/main">
               <a:ext uri="{FF2B5EF4-FFF2-40B4-BE49-F238E27FC236}">
-                <a16:creationId xmlns:a16="http://schemas.microsoft.com/office/drawing/2014/main" id="{00FEA1F6-1AFD-4A87-8C9E-EA6A7D4637D8}"/>
+                <a16:creationId xmlns:a16="http://schemas.microsoft.com/office/drawing/2014/main" id="{E002F11B-FF26-492F-BFA2-1AB8899FD3A6}"/>
               </a:ext>
             </a:extLst>
           </p:cNvPr>
@@ -2341,7 +2341,7 @@
           <p:cNvPr id="11" name="">
             <a:extLst xmlns:a="http://schemas.openxmlformats.org/drawingml/2006/main">
               <a:ext uri="{FF2B5EF4-FFF2-40B4-BE49-F238E27FC236}">
-                <a16:creationId xmlns:a16="http://schemas.microsoft.com/office/drawing/2014/main" id="{21E8F82E-39EC-4F18-8C0E-1330FEF2B316}"/>
+                <a16:creationId xmlns:a16="http://schemas.microsoft.com/office/drawing/2014/main" id="{333FFC35-901E-4485-BE36-1B0DF86DAB86}"/>
               </a:ext>
             </a:extLst>
           </p:cNvPr>
@@ -2396,7 +2396,7 @@
     </p:spTree>
     <p:extLst>
       <p:ext uri="{BB962C8B-B14F-4D97-AF65-F5344CB8AC3E}">
-        <p14:creationId xmlns:p14="http://schemas.microsoft.com/office/powerpoint/2010/main" val="257868704"/>
+        <p14:creationId xmlns:p14="http://schemas.microsoft.com/office/powerpoint/2010/main" val="555144792"/>
       </p:ext>
     </p:extLst>
   </p:cSld>
@@ -2427,7 +2427,7 @@
           <p:cNvPr id="14" name="">
             <a:extLst xmlns:a="http://schemas.openxmlformats.org/drawingml/2006/main">
               <a:ext uri="{FF2B5EF4-FFF2-40B4-BE49-F238E27FC236}">
-                <a16:creationId xmlns:a16="http://schemas.microsoft.com/office/drawing/2014/main" id="{1295A670-9474-4722-B9F4-8E10C1698329}"/>
+                <a16:creationId xmlns:a16="http://schemas.microsoft.com/office/drawing/2014/main" id="{99710016-CDB2-4B95-8EFC-6CEBC259DE5C}"/>
               </a:ext>
             </a:extLst>
           </p:cNvPr>
@@ -2459,7 +2459,7 @@
           <p:cNvPr id="2" name="">
             <a:extLst xmlns:a="http://schemas.openxmlformats.org/drawingml/2006/main">
               <a:ext uri="{FF2B5EF4-FFF2-40B4-BE49-F238E27FC236}">
-                <a16:creationId xmlns:a16="http://schemas.microsoft.com/office/drawing/2014/main" id="{DABEDAF0-BC34-4006-AA67-C5E71886B834}"/>
+                <a16:creationId xmlns:a16="http://schemas.microsoft.com/office/drawing/2014/main" id="{1C70C1F5-6FEB-4974-A51A-3B15594450C0}"/>
               </a:ext>
             </a:extLst>
           </p:cNvPr>
@@ -2516,7 +2516,7 @@
           <p:cNvPr id="3" name="">
             <a:extLst xmlns:a="http://schemas.openxmlformats.org/drawingml/2006/main">
               <a:ext uri="{FF2B5EF4-FFF2-40B4-BE49-F238E27FC236}">
-                <a16:creationId xmlns:a16="http://schemas.microsoft.com/office/drawing/2014/main" id="{DBDFB947-A5FF-41B4-A8F1-7F50463C6006}"/>
+                <a16:creationId xmlns:a16="http://schemas.microsoft.com/office/drawing/2014/main" id="{6E9E0472-A45B-435E-9BDE-AA2DB9D23097}"/>
               </a:ext>
             </a:extLst>
           </p:cNvPr>
@@ -2548,7 +2548,7 @@
           <p:cNvPr id="4" name="">
             <a:extLst xmlns:a="http://schemas.openxmlformats.org/drawingml/2006/main">
               <a:ext uri="{FF2B5EF4-FFF2-40B4-BE49-F238E27FC236}">
-                <a16:creationId xmlns:a16="http://schemas.microsoft.com/office/drawing/2014/main" id="{55E9E59E-9ED6-4878-8657-74E0CFC356A9}"/>
+                <a16:creationId xmlns:a16="http://schemas.microsoft.com/office/drawing/2014/main" id="{644C0933-39C9-40BE-8D37-37C8C0D4C784}"/>
               </a:ext>
             </a:extLst>
           </p:cNvPr>
@@ -2605,7 +2605,7 @@
           <p:cNvPr id="5" name="">
             <a:extLst xmlns:a="http://schemas.openxmlformats.org/drawingml/2006/main">
               <a:ext uri="{FF2B5EF4-FFF2-40B4-BE49-F238E27FC236}">
-                <a16:creationId xmlns:a16="http://schemas.microsoft.com/office/drawing/2014/main" id="{48870963-DCE5-456F-9070-D1D2DF37388C}"/>
+                <a16:creationId xmlns:a16="http://schemas.microsoft.com/office/drawing/2014/main" id="{1C771859-D843-42CD-8031-9ED3B9617E73}"/>
               </a:ext>
             </a:extLst>
           </p:cNvPr>
@@ -2662,7 +2662,7 @@
           <p:cNvPr id="6" name="">
             <a:extLst xmlns:a="http://schemas.openxmlformats.org/drawingml/2006/main">
               <a:ext uri="{FF2B5EF4-FFF2-40B4-BE49-F238E27FC236}">
-                <a16:creationId xmlns:a16="http://schemas.microsoft.com/office/drawing/2014/main" id="{33BC850E-658B-4B13-81F7-7F081C569B42}"/>
+                <a16:creationId xmlns:a16="http://schemas.microsoft.com/office/drawing/2014/main" id="{41665D42-0EB1-4560-92E9-ECCA143409B6}"/>
               </a:ext>
             </a:extLst>
           </p:cNvPr>
@@ -2719,7 +2719,7 @@
           <p:cNvPr id="7" name="">
             <a:extLst xmlns:a="http://schemas.openxmlformats.org/drawingml/2006/main">
               <a:ext uri="{FF2B5EF4-FFF2-40B4-BE49-F238E27FC236}">
-                <a16:creationId xmlns:a16="http://schemas.microsoft.com/office/drawing/2014/main" id="{D84316F8-3A04-4044-8E2B-E31085ECE504}"/>
+                <a16:creationId xmlns:a16="http://schemas.microsoft.com/office/drawing/2014/main" id="{C9D76CEE-759A-46E0-86BB-48A4A9BCF4C3}"/>
               </a:ext>
             </a:extLst>
           </p:cNvPr>
@@ -2751,7 +2751,7 @@
           <p:cNvPr id="8" name="">
             <a:extLst xmlns:a="http://schemas.openxmlformats.org/drawingml/2006/main">
               <a:ext uri="{FF2B5EF4-FFF2-40B4-BE49-F238E27FC236}">
-                <a16:creationId xmlns:a16="http://schemas.microsoft.com/office/drawing/2014/main" id="{1E81ED44-A0E3-43DF-9C02-E6E5EA2A855C}"/>
+                <a16:creationId xmlns:a16="http://schemas.microsoft.com/office/drawing/2014/main" id="{69C79FEA-FD02-4545-95EF-5F8781DC1C5F}"/>
               </a:ext>
             </a:extLst>
           </p:cNvPr>
@@ -2808,7 +2808,7 @@
           <p:cNvPr id="9" name="">
             <a:extLst xmlns:a="http://schemas.openxmlformats.org/drawingml/2006/main">
               <a:ext uri="{FF2B5EF4-FFF2-40B4-BE49-F238E27FC236}">
-                <a16:creationId xmlns:a16="http://schemas.microsoft.com/office/drawing/2014/main" id="{8677CBEB-2065-47A8-80FF-DE07015205E0}"/>
+                <a16:creationId xmlns:a16="http://schemas.microsoft.com/office/drawing/2014/main" id="{14594679-888C-447C-A53D-929890D06726}"/>
               </a:ext>
             </a:extLst>
           </p:cNvPr>
@@ -2865,7 +2865,7 @@
           <p:cNvPr id="10" name="">
             <a:extLst xmlns:a="http://schemas.openxmlformats.org/drawingml/2006/main">
               <a:ext uri="{FF2B5EF4-FFF2-40B4-BE49-F238E27FC236}">
-                <a16:creationId xmlns:a16="http://schemas.microsoft.com/office/drawing/2014/main" id="{C6B73EAD-6050-49B4-B55F-DF579E97CA62}"/>
+                <a16:creationId xmlns:a16="http://schemas.microsoft.com/office/drawing/2014/main" id="{77A3D419-6BB0-4A5B-86C4-E0E24D3BF8C4}"/>
               </a:ext>
             </a:extLst>
           </p:cNvPr>
@@ -2922,7 +2922,7 @@
           <p:cNvPr id="11" name="">
             <a:extLst xmlns:a="http://schemas.openxmlformats.org/drawingml/2006/main">
               <a:ext uri="{FF2B5EF4-FFF2-40B4-BE49-F238E27FC236}">
-                <a16:creationId xmlns:a16="http://schemas.microsoft.com/office/drawing/2014/main" id="{3E70E5F8-94A7-48F6-A798-493A86AC4009}"/>
+                <a16:creationId xmlns:a16="http://schemas.microsoft.com/office/drawing/2014/main" id="{25429C9A-2BBB-4AA7-B55E-FC04FBAEC9F8}"/>
               </a:ext>
             </a:extLst>
           </p:cNvPr>
@@ -2979,7 +2979,7 @@
           <p:cNvPr id="12" name="">
             <a:extLst xmlns:a="http://schemas.openxmlformats.org/drawingml/2006/main">
               <a:ext uri="{FF2B5EF4-FFF2-40B4-BE49-F238E27FC236}">
-                <a16:creationId xmlns:a16="http://schemas.microsoft.com/office/drawing/2014/main" id="{C7CBA6BE-8BAD-4F54-8C4C-56467FAEFDD6}"/>
+                <a16:creationId xmlns:a16="http://schemas.microsoft.com/office/drawing/2014/main" id="{FCDC1A8F-208D-46BE-9661-39322315C42D}"/>
               </a:ext>
             </a:extLst>
           </p:cNvPr>
@@ -3036,7 +3036,7 @@
           <p:cNvPr id="13" name="">
             <a:extLst xmlns:a="http://schemas.openxmlformats.org/drawingml/2006/main">
               <a:ext uri="{FF2B5EF4-FFF2-40B4-BE49-F238E27FC236}">
-                <a16:creationId xmlns:a16="http://schemas.microsoft.com/office/drawing/2014/main" id="{FECFC6DA-FC32-496E-B7FF-19E1422085BF}"/>
+                <a16:creationId xmlns:a16="http://schemas.microsoft.com/office/drawing/2014/main" id="{56164CD0-D9B2-410C-A205-D085AACF841D}"/>
               </a:ext>
             </a:extLst>
           </p:cNvPr>
@@ -3091,7 +3091,7 @@
     </p:spTree>
     <p:extLst>
       <p:ext uri="{BB962C8B-B14F-4D97-AF65-F5344CB8AC3E}">
-        <p14:creationId xmlns:p14="http://schemas.microsoft.com/office/powerpoint/2010/main" val="763425630"/>
+        <p14:creationId xmlns:p14="http://schemas.microsoft.com/office/powerpoint/2010/main" val="493552396"/>
       </p:ext>
     </p:extLst>
   </p:cSld>
@@ -3292,7 +3292,7 @@
           <p:cNvPr id="19" name="">
             <a:extLst xmlns:a="http://schemas.openxmlformats.org/drawingml/2006/main">
               <a:ext uri="{FF2B5EF4-FFF2-40B4-BE49-F238E27FC236}">
-                <a16:creationId xmlns:a16="http://schemas.microsoft.com/office/drawing/2014/main" id="{8C2A24B3-FB52-4854-BE57-67A8F4714432}"/>
+                <a16:creationId xmlns:a16="http://schemas.microsoft.com/office/drawing/2014/main" id="{9BF6B82F-C553-4D1D-9A38-7DE11D359E88}"/>
               </a:ext>
             </a:extLst>
           </p:cNvPr>
@@ -3324,7 +3324,7 @@
           <p:cNvPr id="2" name="">
             <a:extLst xmlns:a="http://schemas.openxmlformats.org/drawingml/2006/main">
               <a:ext uri="{FF2B5EF4-FFF2-40B4-BE49-F238E27FC236}">
-                <a16:creationId xmlns:a16="http://schemas.microsoft.com/office/drawing/2014/main" id="{4497636E-7A83-46E0-A5A5-894BA6AFE74D}"/>
+                <a16:creationId xmlns:a16="http://schemas.microsoft.com/office/drawing/2014/main" id="{344FC36F-5A6C-4D85-ABBB-DFCCC2063645}"/>
               </a:ext>
             </a:extLst>
           </p:cNvPr>
@@ -3381,7 +3381,7 @@
           <p:cNvPr id="3" name="">
             <a:extLst xmlns:a="http://schemas.openxmlformats.org/drawingml/2006/main">
               <a:ext uri="{FF2B5EF4-FFF2-40B4-BE49-F238E27FC236}">
-                <a16:creationId xmlns:a16="http://schemas.microsoft.com/office/drawing/2014/main" id="{828D63D9-B5AE-4E83-96E5-54EF4E51EB5F}"/>
+                <a16:creationId xmlns:a16="http://schemas.microsoft.com/office/drawing/2014/main" id="{E7D3A0B7-2EC6-4096-AB76-2B6D3CF8214C}"/>
               </a:ext>
             </a:extLst>
           </p:cNvPr>
@@ -3413,7 +3413,7 @@
           <p:cNvPr id="4" name="">
             <a:extLst xmlns:a="http://schemas.openxmlformats.org/drawingml/2006/main">
               <a:ext uri="{FF2B5EF4-FFF2-40B4-BE49-F238E27FC236}">
-                <a16:creationId xmlns:a16="http://schemas.microsoft.com/office/drawing/2014/main" id="{0FF48FAA-1234-4774-A218-9C685FB88D43}"/>
+                <a16:creationId xmlns:a16="http://schemas.microsoft.com/office/drawing/2014/main" id="{BF017FE8-EFFF-42B8-A7C1-D419B20B7DAE}"/>
               </a:ext>
             </a:extLst>
           </p:cNvPr>
@@ -3470,7 +3470,7 @@
           <p:cNvPr id="5" name="">
             <a:extLst xmlns:a="http://schemas.openxmlformats.org/drawingml/2006/main">
               <a:ext uri="{FF2B5EF4-FFF2-40B4-BE49-F238E27FC236}">
-                <a16:creationId xmlns:a16="http://schemas.microsoft.com/office/drawing/2014/main" id="{5CB69482-ED9F-4ECB-A641-2C2E0D2D8293}"/>
+                <a16:creationId xmlns:a16="http://schemas.microsoft.com/office/drawing/2014/main" id="{0398EBD7-EEAF-4092-8C7B-E5E88B9D7D81}"/>
               </a:ext>
             </a:extLst>
           </p:cNvPr>
@@ -3527,7 +3527,7 @@
           <p:cNvPr id="6" name="">
             <a:extLst xmlns:a="http://schemas.openxmlformats.org/drawingml/2006/main">
               <a:ext uri="{FF2B5EF4-FFF2-40B4-BE49-F238E27FC236}">
-                <a16:creationId xmlns:a16="http://schemas.microsoft.com/office/drawing/2014/main" id="{FC65DBA3-48F9-41F8-9C17-57005C68BBD0}"/>
+                <a16:creationId xmlns:a16="http://schemas.microsoft.com/office/drawing/2014/main" id="{C37A32FE-9C06-4D44-B3A2-1CFADB36E304}"/>
               </a:ext>
             </a:extLst>
           </p:cNvPr>
@@ -3584,7 +3584,7 @@
           <p:cNvPr id="7" name="">
             <a:extLst xmlns:a="http://schemas.openxmlformats.org/drawingml/2006/main">
               <a:ext uri="{FF2B5EF4-FFF2-40B4-BE49-F238E27FC236}">
-                <a16:creationId xmlns:a16="http://schemas.microsoft.com/office/drawing/2014/main" id="{DAFDEABE-CC80-4B9B-8D18-950FEFFB397D}"/>
+                <a16:creationId xmlns:a16="http://schemas.microsoft.com/office/drawing/2014/main" id="{CA2B1675-47A9-4670-8402-5C7C77C1023E}"/>
               </a:ext>
             </a:extLst>
           </p:cNvPr>
@@ -3616,7 +3616,7 @@
           <p:cNvPr id="8" name="">
             <a:extLst xmlns:a="http://schemas.openxmlformats.org/drawingml/2006/main">
               <a:ext uri="{FF2B5EF4-FFF2-40B4-BE49-F238E27FC236}">
-                <a16:creationId xmlns:a16="http://schemas.microsoft.com/office/drawing/2014/main" id="{3E940527-5D50-4711-8E2A-F58DBD071875}"/>
+                <a16:creationId xmlns:a16="http://schemas.microsoft.com/office/drawing/2014/main" id="{28B95A47-FCC8-4E96-8A86-C25A279CAC81}"/>
               </a:ext>
             </a:extLst>
           </p:cNvPr>
@@ -3673,7 +3673,7 @@
           <p:cNvPr id="9" name="">
             <a:extLst xmlns:a="http://schemas.openxmlformats.org/drawingml/2006/main">
               <a:ext uri="{FF2B5EF4-FFF2-40B4-BE49-F238E27FC236}">
-                <a16:creationId xmlns:a16="http://schemas.microsoft.com/office/drawing/2014/main" id="{0C35BC3E-BD53-4F26-B26C-1E9F6CFF0ACE}"/>
+                <a16:creationId xmlns:a16="http://schemas.microsoft.com/office/drawing/2014/main" id="{063A1BED-9288-42CE-A7E6-BCE04744146E}"/>
               </a:ext>
             </a:extLst>
           </p:cNvPr>
@@ -3730,7 +3730,7 @@
           <p:cNvPr id="10" name="">
             <a:extLst xmlns:a="http://schemas.openxmlformats.org/drawingml/2006/main">
               <a:ext uri="{FF2B5EF4-FFF2-40B4-BE49-F238E27FC236}">
-                <a16:creationId xmlns:a16="http://schemas.microsoft.com/office/drawing/2014/main" id="{9FF214C0-6A2F-4A0C-8311-37D8A71C0C81}"/>
+                <a16:creationId xmlns:a16="http://schemas.microsoft.com/office/drawing/2014/main" id="{11B057A2-C89A-42DF-95BE-1A3A085869DB}"/>
               </a:ext>
             </a:extLst>
           </p:cNvPr>
@@ -3787,7 +3787,7 @@
           <p:cNvPr id="11" name="">
             <a:extLst xmlns:a="http://schemas.openxmlformats.org/drawingml/2006/main">
               <a:ext uri="{FF2B5EF4-FFF2-40B4-BE49-F238E27FC236}">
-                <a16:creationId xmlns:a16="http://schemas.microsoft.com/office/drawing/2014/main" id="{3AF62D06-6C0F-49CC-8C9E-00BC0E776939}"/>
+                <a16:creationId xmlns:a16="http://schemas.microsoft.com/office/drawing/2014/main" id="{9C721FFC-FEE9-48A7-A277-8A85A54A16E2}"/>
               </a:ext>
             </a:extLst>
           </p:cNvPr>
@@ -3821,7 +3821,7 @@
           <p:cNvPr id="12" name="">
             <a:extLst xmlns:a="http://schemas.openxmlformats.org/drawingml/2006/main">
               <a:ext uri="{FF2B5EF4-FFF2-40B4-BE49-F238E27FC236}">
-                <a16:creationId xmlns:a16="http://schemas.microsoft.com/office/drawing/2014/main" id="{1654A723-AA17-4C8B-870B-E098EE53BDBA}"/>
+                <a16:creationId xmlns:a16="http://schemas.microsoft.com/office/drawing/2014/main" id="{DE80E074-AEDF-41F4-9DCC-0212F014E352}"/>
               </a:ext>
             </a:extLst>
           </p:cNvPr>
@@ -3878,7 +3878,7 @@
           <p:cNvPr id="13" name="">
             <a:extLst xmlns:a="http://schemas.openxmlformats.org/drawingml/2006/main">
               <a:ext uri="{FF2B5EF4-FFF2-40B4-BE49-F238E27FC236}">
-                <a16:creationId xmlns:a16="http://schemas.microsoft.com/office/drawing/2014/main" id="{43B2CB56-4449-4F0C-8202-E820275EE518}"/>
+                <a16:creationId xmlns:a16="http://schemas.microsoft.com/office/drawing/2014/main" id="{845DF088-3804-423C-81AC-1F8E1309E6F0}"/>
               </a:ext>
             </a:extLst>
           </p:cNvPr>
@@ -3935,7 +3935,7 @@
           <p:cNvPr id="14" name="">
             <a:extLst xmlns:a="http://schemas.openxmlformats.org/drawingml/2006/main">
               <a:ext uri="{FF2B5EF4-FFF2-40B4-BE49-F238E27FC236}">
-                <a16:creationId xmlns:a16="http://schemas.microsoft.com/office/drawing/2014/main" id="{A17DD552-3137-40A2-B87F-83A38AA4B700}"/>
+                <a16:creationId xmlns:a16="http://schemas.microsoft.com/office/drawing/2014/main" id="{91EC6D6D-68CC-4DBE-9FD9-1C85FC5762CD}"/>
               </a:ext>
             </a:extLst>
           </p:cNvPr>
@@ -3992,7 +3992,7 @@
           <p:cNvPr id="15" name="">
             <a:extLst xmlns:a="http://schemas.openxmlformats.org/drawingml/2006/main">
               <a:ext uri="{FF2B5EF4-FFF2-40B4-BE49-F238E27FC236}">
-                <a16:creationId xmlns:a16="http://schemas.microsoft.com/office/drawing/2014/main" id="{E8D02857-0C35-4CAF-B982-27F7E3AB6D03}"/>
+                <a16:creationId xmlns:a16="http://schemas.microsoft.com/office/drawing/2014/main" id="{5A524E22-DC6E-4BC0-8E25-BEA9152E58A0}"/>
               </a:ext>
             </a:extLst>
           </p:cNvPr>
@@ -4026,7 +4026,7 @@
           <p:cNvPr id="16" name="">
             <a:extLst xmlns:a="http://schemas.openxmlformats.org/drawingml/2006/main">
               <a:ext uri="{FF2B5EF4-FFF2-40B4-BE49-F238E27FC236}">
-                <a16:creationId xmlns:a16="http://schemas.microsoft.com/office/drawing/2014/main" id="{F84A7F22-D2FA-46CC-B6A3-14E0CD7AE3BE}"/>
+                <a16:creationId xmlns:a16="http://schemas.microsoft.com/office/drawing/2014/main" id="{90089D1F-BABC-4D10-AFA2-C41B37ACAF1A}"/>
               </a:ext>
             </a:extLst>
           </p:cNvPr>
@@ -4083,7 +4083,7 @@
           <p:cNvPr id="17" name="">
             <a:extLst xmlns:a="http://schemas.openxmlformats.org/drawingml/2006/main">
               <a:ext uri="{FF2B5EF4-FFF2-40B4-BE49-F238E27FC236}">
-                <a16:creationId xmlns:a16="http://schemas.microsoft.com/office/drawing/2014/main" id="{D1D81D04-E0DF-40E7-ACBB-FBB7D8D738BF}"/>
+                <a16:creationId xmlns:a16="http://schemas.microsoft.com/office/drawing/2014/main" id="{10EEC189-FDA1-45AE-93CC-0379FE3A4BD9}"/>
               </a:ext>
             </a:extLst>
           </p:cNvPr>
@@ -4140,7 +4140,7 @@
           <p:cNvPr id="18" name="">
             <a:extLst xmlns:a="http://schemas.openxmlformats.org/drawingml/2006/main">
               <a:ext uri="{FF2B5EF4-FFF2-40B4-BE49-F238E27FC236}">
-                <a16:creationId xmlns:a16="http://schemas.microsoft.com/office/drawing/2014/main" id="{E05A1793-409E-4709-98AE-7723A160B4D9}"/>
+                <a16:creationId xmlns:a16="http://schemas.microsoft.com/office/drawing/2014/main" id="{3B3CD73A-4191-4793-9E16-2F94493DD1F7}"/>
               </a:ext>
             </a:extLst>
           </p:cNvPr>
@@ -4195,7 +4195,7 @@
     </p:spTree>
     <p:extLst>
       <p:ext uri="{BB962C8B-B14F-4D97-AF65-F5344CB8AC3E}">
-        <p14:creationId xmlns:p14="http://schemas.microsoft.com/office/powerpoint/2010/main" val="984254348"/>
+        <p14:creationId xmlns:p14="http://schemas.microsoft.com/office/powerpoint/2010/main" val="1475408703"/>
       </p:ext>
     </p:extLst>
   </p:cSld>
@@ -4350,7 +4350,7 @@
           <p:cNvPr id="23" name="">
             <a:extLst xmlns:a="http://schemas.openxmlformats.org/drawingml/2006/main">
               <a:ext uri="{FF2B5EF4-FFF2-40B4-BE49-F238E27FC236}">
-                <a16:creationId xmlns:a16="http://schemas.microsoft.com/office/drawing/2014/main" id="{062D1B65-23F6-437A-997A-8898478E81FC}"/>
+                <a16:creationId xmlns:a16="http://schemas.microsoft.com/office/drawing/2014/main" id="{C2913E6F-4008-48FF-8DA5-41AC11260E9E}"/>
               </a:ext>
             </a:extLst>
           </p:cNvPr>
@@ -4382,7 +4382,7 @@
           <p:cNvPr id="2" name="">
             <a:extLst xmlns:a="http://schemas.openxmlformats.org/drawingml/2006/main">
               <a:ext uri="{FF2B5EF4-FFF2-40B4-BE49-F238E27FC236}">
-                <a16:creationId xmlns:a16="http://schemas.microsoft.com/office/drawing/2014/main" id="{609EE7A0-811E-49B7-BA16-CE63B33CFC25}"/>
+                <a16:creationId xmlns:a16="http://schemas.microsoft.com/office/drawing/2014/main" id="{6171D900-E330-4B32-9597-4780A726ED3F}"/>
               </a:ext>
             </a:extLst>
           </p:cNvPr>
@@ -4439,7 +4439,7 @@
           <p:cNvPr id="3" name="">
             <a:extLst xmlns:a="http://schemas.openxmlformats.org/drawingml/2006/main">
               <a:ext uri="{FF2B5EF4-FFF2-40B4-BE49-F238E27FC236}">
-                <a16:creationId xmlns:a16="http://schemas.microsoft.com/office/drawing/2014/main" id="{C1B2723A-27DB-457A-9431-54A48160075F}"/>
+                <a16:creationId xmlns:a16="http://schemas.microsoft.com/office/drawing/2014/main" id="{11C5021A-4065-4651-ADCB-C2A3349EF43B}"/>
               </a:ext>
             </a:extLst>
           </p:cNvPr>
@@ -4471,7 +4471,7 @@
           <p:cNvPr id="4" name="">
             <a:extLst xmlns:a="http://schemas.openxmlformats.org/drawingml/2006/main">
               <a:ext uri="{FF2B5EF4-FFF2-40B4-BE49-F238E27FC236}">
-                <a16:creationId xmlns:a16="http://schemas.microsoft.com/office/drawing/2014/main" id="{D16D0629-2FC1-41F8-B57B-E41FD05A89E8}"/>
+                <a16:creationId xmlns:a16="http://schemas.microsoft.com/office/drawing/2014/main" id="{01C4008D-9644-4982-91A9-2FFAACD45C73}"/>
               </a:ext>
             </a:extLst>
           </p:cNvPr>
@@ -4528,7 +4528,7 @@
           <p:cNvPr id="5" name="">
             <a:extLst xmlns:a="http://schemas.openxmlformats.org/drawingml/2006/main">
               <a:ext uri="{FF2B5EF4-FFF2-40B4-BE49-F238E27FC236}">
-                <a16:creationId xmlns:a16="http://schemas.microsoft.com/office/drawing/2014/main" id="{27DE594A-A659-4A33-98A6-6E7CCF08AF83}"/>
+                <a16:creationId xmlns:a16="http://schemas.microsoft.com/office/drawing/2014/main" id="{6EBB175A-2439-4047-9850-33014E9EFB4C}"/>
               </a:ext>
             </a:extLst>
           </p:cNvPr>
@@ -4585,7 +4585,7 @@
           <p:cNvPr id="6" name="">
             <a:extLst xmlns:a="http://schemas.openxmlformats.org/drawingml/2006/main">
               <a:ext uri="{FF2B5EF4-FFF2-40B4-BE49-F238E27FC236}">
-                <a16:creationId xmlns:a16="http://schemas.microsoft.com/office/drawing/2014/main" id="{448043AC-DC4B-4014-90A1-32C3A9D2E45A}"/>
+                <a16:creationId xmlns:a16="http://schemas.microsoft.com/office/drawing/2014/main" id="{7632B9D8-F48D-411E-A9BE-912750AB688C}"/>
               </a:ext>
             </a:extLst>
           </p:cNvPr>
@@ -4642,7 +4642,7 @@
           <p:cNvPr id="7" name="">
             <a:extLst xmlns:a="http://schemas.openxmlformats.org/drawingml/2006/main">
               <a:ext uri="{FF2B5EF4-FFF2-40B4-BE49-F238E27FC236}">
-                <a16:creationId xmlns:a16="http://schemas.microsoft.com/office/drawing/2014/main" id="{807AE6D5-B05B-49FC-8991-A0AD072A2FE7}"/>
+                <a16:creationId xmlns:a16="http://schemas.microsoft.com/office/drawing/2014/main" id="{F8922068-D29D-4663-BF67-1014951C4DA0}"/>
               </a:ext>
             </a:extLst>
           </p:cNvPr>
@@ -4674,7 +4674,7 @@
           <p:cNvPr id="8" name="">
             <a:extLst xmlns:a="http://schemas.openxmlformats.org/drawingml/2006/main">
               <a:ext uri="{FF2B5EF4-FFF2-40B4-BE49-F238E27FC236}">
-                <a16:creationId xmlns:a16="http://schemas.microsoft.com/office/drawing/2014/main" id="{07C2B97A-D1E8-4D5B-8DE2-0FB91F41F9EE}"/>
+                <a16:creationId xmlns:a16="http://schemas.microsoft.com/office/drawing/2014/main" id="{CBFF0B6C-C51A-450C-9713-570AA9B3ECE6}"/>
               </a:ext>
             </a:extLst>
           </p:cNvPr>
@@ -4731,7 +4731,7 @@
           <p:cNvPr id="9" name="">
             <a:extLst xmlns:a="http://schemas.openxmlformats.org/drawingml/2006/main">
               <a:ext uri="{FF2B5EF4-FFF2-40B4-BE49-F238E27FC236}">
-                <a16:creationId xmlns:a16="http://schemas.microsoft.com/office/drawing/2014/main" id="{D3966202-C0CF-40D6-B29A-736D32F11D72}"/>
+                <a16:creationId xmlns:a16="http://schemas.microsoft.com/office/drawing/2014/main" id="{18AB3B95-2A7E-4D3F-B088-0B56D47AC9C0}"/>
               </a:ext>
             </a:extLst>
           </p:cNvPr>
@@ -4788,7 +4788,7 @@
           <p:cNvPr id="10" name="">
             <a:extLst xmlns:a="http://schemas.openxmlformats.org/drawingml/2006/main">
               <a:ext uri="{FF2B5EF4-FFF2-40B4-BE49-F238E27FC236}">
-                <a16:creationId xmlns:a16="http://schemas.microsoft.com/office/drawing/2014/main" id="{3A9D393B-F424-4E2E-B955-F7235DA535CD}"/>
+                <a16:creationId xmlns:a16="http://schemas.microsoft.com/office/drawing/2014/main" id="{9C1E868B-E074-4F99-BE14-8A6D2E772AA8}"/>
               </a:ext>
             </a:extLst>
           </p:cNvPr>
@@ -4822,7 +4822,7 @@
           <p:cNvPr id="11" name="">
             <a:extLst xmlns:a="http://schemas.openxmlformats.org/drawingml/2006/main">
               <a:ext uri="{FF2B5EF4-FFF2-40B4-BE49-F238E27FC236}">
-                <a16:creationId xmlns:a16="http://schemas.microsoft.com/office/drawing/2014/main" id="{177A7B94-E373-4CEB-A625-AB2BE9E862C9}"/>
+                <a16:creationId xmlns:a16="http://schemas.microsoft.com/office/drawing/2014/main" id="{C6BC478E-A661-482D-BE30-EB591CBC919F}"/>
               </a:ext>
             </a:extLst>
           </p:cNvPr>
@@ -4854,7 +4854,7 @@
           <p:cNvPr id="12" name="">
             <a:extLst xmlns:a="http://schemas.openxmlformats.org/drawingml/2006/main">
               <a:ext uri="{FF2B5EF4-FFF2-40B4-BE49-F238E27FC236}">
-                <a16:creationId xmlns:a16="http://schemas.microsoft.com/office/drawing/2014/main" id="{48B2AD6F-24EC-41D8-B1C4-3ACBE304814B}"/>
+                <a16:creationId xmlns:a16="http://schemas.microsoft.com/office/drawing/2014/main" id="{A9EC41D3-79FE-413B-95F3-8F81DEACD415}"/>
               </a:ext>
             </a:extLst>
           </p:cNvPr>
@@ -4911,7 +4911,7 @@
           <p:cNvPr id="13" name="">
             <a:extLst xmlns:a="http://schemas.openxmlformats.org/drawingml/2006/main">
               <a:ext uri="{FF2B5EF4-FFF2-40B4-BE49-F238E27FC236}">
-                <a16:creationId xmlns:a16="http://schemas.microsoft.com/office/drawing/2014/main" id="{9ABB5009-026F-4508-8AD4-1EF00F1FBF22}"/>
+                <a16:creationId xmlns:a16="http://schemas.microsoft.com/office/drawing/2014/main" id="{458F7E3B-318E-4B25-A04A-76B48E4D08CE}"/>
               </a:ext>
             </a:extLst>
           </p:cNvPr>
@@ -4968,7 +4968,7 @@
           <p:cNvPr id="14" name="">
             <a:extLst xmlns:a="http://schemas.openxmlformats.org/drawingml/2006/main">
               <a:ext uri="{FF2B5EF4-FFF2-40B4-BE49-F238E27FC236}">
-                <a16:creationId xmlns:a16="http://schemas.microsoft.com/office/drawing/2014/main" id="{25F3FD08-5BE5-4E40-9994-007D5275708C}"/>
+                <a16:creationId xmlns:a16="http://schemas.microsoft.com/office/drawing/2014/main" id="{CA93BE9B-358F-4240-AA03-99CB1031D9D1}"/>
               </a:ext>
             </a:extLst>
           </p:cNvPr>
@@ -5002,7 +5002,7 @@
           <p:cNvPr id="15" name="">
             <a:extLst xmlns:a="http://schemas.openxmlformats.org/drawingml/2006/main">
               <a:ext uri="{FF2B5EF4-FFF2-40B4-BE49-F238E27FC236}">
-                <a16:creationId xmlns:a16="http://schemas.microsoft.com/office/drawing/2014/main" id="{EC99F198-D324-47B2-8E6F-E59781D3AC8C}"/>
+                <a16:creationId xmlns:a16="http://schemas.microsoft.com/office/drawing/2014/main" id="{07EC1105-7EC9-440E-9859-C645F6F25C1D}"/>
               </a:ext>
             </a:extLst>
           </p:cNvPr>
@@ -5034,7 +5034,7 @@
           <p:cNvPr id="16" name="">
             <a:extLst xmlns:a="http://schemas.openxmlformats.org/drawingml/2006/main">
               <a:ext uri="{FF2B5EF4-FFF2-40B4-BE49-F238E27FC236}">
-                <a16:creationId xmlns:a16="http://schemas.microsoft.com/office/drawing/2014/main" id="{72FEDF1A-D9F0-44DA-9F8E-FBE96A82048B}"/>
+                <a16:creationId xmlns:a16="http://schemas.microsoft.com/office/drawing/2014/main" id="{BECCAD00-15E9-4327-ACA6-656DD008115A}"/>
               </a:ext>
             </a:extLst>
           </p:cNvPr>
@@ -5091,7 +5091,7 @@
           <p:cNvPr id="17" name="">
             <a:extLst xmlns:a="http://schemas.openxmlformats.org/drawingml/2006/main">
               <a:ext uri="{FF2B5EF4-FFF2-40B4-BE49-F238E27FC236}">
-                <a16:creationId xmlns:a16="http://schemas.microsoft.com/office/drawing/2014/main" id="{32D2CEC2-8F1B-4AAA-BB49-302338132E02}"/>
+                <a16:creationId xmlns:a16="http://schemas.microsoft.com/office/drawing/2014/main" id="{09243016-E57D-4D6A-9AC5-D6CC2D989F1A}"/>
               </a:ext>
             </a:extLst>
           </p:cNvPr>
@@ -5148,7 +5148,7 @@
           <p:cNvPr id="18" name="">
             <a:extLst xmlns:a="http://schemas.openxmlformats.org/drawingml/2006/main">
               <a:ext uri="{FF2B5EF4-FFF2-40B4-BE49-F238E27FC236}">
-                <a16:creationId xmlns:a16="http://schemas.microsoft.com/office/drawing/2014/main" id="{F623D7BF-D5EF-42EA-860E-A8387BA099FD}"/>
+                <a16:creationId xmlns:a16="http://schemas.microsoft.com/office/drawing/2014/main" id="{C8CB1871-C087-459B-ABB7-4950E7C2004F}"/>
               </a:ext>
             </a:extLst>
           </p:cNvPr>
@@ -5182,7 +5182,7 @@
           <p:cNvPr id="19" name="">
             <a:extLst xmlns:a="http://schemas.openxmlformats.org/drawingml/2006/main">
               <a:ext uri="{FF2B5EF4-FFF2-40B4-BE49-F238E27FC236}">
-                <a16:creationId xmlns:a16="http://schemas.microsoft.com/office/drawing/2014/main" id="{B5EC74EA-4BA6-41AC-B3A0-FA77D91689BA}"/>
+                <a16:creationId xmlns:a16="http://schemas.microsoft.com/office/drawing/2014/main" id="{07AD9755-025E-4CF4-88E7-D6391F5825CA}"/>
               </a:ext>
             </a:extLst>
           </p:cNvPr>
@@ -5214,7 +5214,7 @@
           <p:cNvPr id="20" name="">
             <a:extLst xmlns:a="http://schemas.openxmlformats.org/drawingml/2006/main">
               <a:ext uri="{FF2B5EF4-FFF2-40B4-BE49-F238E27FC236}">
-                <a16:creationId xmlns:a16="http://schemas.microsoft.com/office/drawing/2014/main" id="{92B298E9-C336-4180-B173-E5855CDE7FEA}"/>
+                <a16:creationId xmlns:a16="http://schemas.microsoft.com/office/drawing/2014/main" id="{48D3B92A-D4C3-4A58-AA6B-8FEF5293180F}"/>
               </a:ext>
             </a:extLst>
           </p:cNvPr>
@@ -5271,7 +5271,7 @@
           <p:cNvPr id="21" name="">
             <a:extLst xmlns:a="http://schemas.openxmlformats.org/drawingml/2006/main">
               <a:ext uri="{FF2B5EF4-FFF2-40B4-BE49-F238E27FC236}">
-                <a16:creationId xmlns:a16="http://schemas.microsoft.com/office/drawing/2014/main" id="{40BFF453-4570-4E40-970B-FC56A92F84E3}"/>
+                <a16:creationId xmlns:a16="http://schemas.microsoft.com/office/drawing/2014/main" id="{275672E9-413A-4CAF-8C23-39267D86AAD6}"/>
               </a:ext>
             </a:extLst>
           </p:cNvPr>
@@ -5328,7 +5328,7 @@
           <p:cNvPr id="22" name="">
             <a:extLst xmlns:a="http://schemas.openxmlformats.org/drawingml/2006/main">
               <a:ext uri="{FF2B5EF4-FFF2-40B4-BE49-F238E27FC236}">
-                <a16:creationId xmlns:a16="http://schemas.microsoft.com/office/drawing/2014/main" id="{C0697F7E-A8DF-4F35-B4FC-302055DC3D61}"/>
+                <a16:creationId xmlns:a16="http://schemas.microsoft.com/office/drawing/2014/main" id="{BBDE741A-B8A1-44EB-8A23-A015BF94A917}"/>
               </a:ext>
             </a:extLst>
           </p:cNvPr>
@@ -5383,7 +5383,7 @@
     </p:spTree>
     <p:extLst>
       <p:ext uri="{BB962C8B-B14F-4D97-AF65-F5344CB8AC3E}">
-        <p14:creationId xmlns:p14="http://schemas.microsoft.com/office/powerpoint/2010/main" val="938502721"/>
+        <p14:creationId xmlns:p14="http://schemas.microsoft.com/office/powerpoint/2010/main" val="1127272722"/>
       </p:ext>
     </p:extLst>
   </p:cSld>
@@ -5584,7 +5584,7 @@
           <p:cNvPr id="23" name="">
             <a:extLst xmlns:a="http://schemas.openxmlformats.org/drawingml/2006/main">
               <a:ext uri="{FF2B5EF4-FFF2-40B4-BE49-F238E27FC236}">
-                <a16:creationId xmlns:a16="http://schemas.microsoft.com/office/drawing/2014/main" id="{38335E63-524C-43E7-8FC0-5F9895461477}"/>
+                <a16:creationId xmlns:a16="http://schemas.microsoft.com/office/drawing/2014/main" id="{70A6BFF5-5C24-448C-A21D-97023B5023A7}"/>
               </a:ext>
             </a:extLst>
           </p:cNvPr>
@@ -5616,7 +5616,7 @@
           <p:cNvPr id="2" name="">
             <a:extLst xmlns:a="http://schemas.openxmlformats.org/drawingml/2006/main">
               <a:ext uri="{FF2B5EF4-FFF2-40B4-BE49-F238E27FC236}">
-                <a16:creationId xmlns:a16="http://schemas.microsoft.com/office/drawing/2014/main" id="{54F40BA3-9132-44A9-9B7A-C58FEBDEBAFE}"/>
+                <a16:creationId xmlns:a16="http://schemas.microsoft.com/office/drawing/2014/main" id="{577CC82A-5F5F-4E96-A426-90F2F67CCFBA}"/>
               </a:ext>
             </a:extLst>
           </p:cNvPr>
@@ -5673,7 +5673,7 @@
           <p:cNvPr id="3" name="">
             <a:extLst xmlns:a="http://schemas.openxmlformats.org/drawingml/2006/main">
               <a:ext uri="{FF2B5EF4-FFF2-40B4-BE49-F238E27FC236}">
-                <a16:creationId xmlns:a16="http://schemas.microsoft.com/office/drawing/2014/main" id="{53D11F33-0D37-4BA2-8439-C11223F001C3}"/>
+                <a16:creationId xmlns:a16="http://schemas.microsoft.com/office/drawing/2014/main" id="{BD9CE586-99E8-4BD9-B32B-37E55FAA90DE}"/>
               </a:ext>
             </a:extLst>
           </p:cNvPr>
@@ -5705,7 +5705,7 @@
           <p:cNvPr id="4" name="">
             <a:extLst xmlns:a="http://schemas.openxmlformats.org/drawingml/2006/main">
               <a:ext uri="{FF2B5EF4-FFF2-40B4-BE49-F238E27FC236}">
-                <a16:creationId xmlns:a16="http://schemas.microsoft.com/office/drawing/2014/main" id="{716C9457-B5B9-46E7-83BC-93A35F37D0D1}"/>
+                <a16:creationId xmlns:a16="http://schemas.microsoft.com/office/drawing/2014/main" id="{D59AD87F-49D6-4E66-BD4E-1287D3BD15DE}"/>
               </a:ext>
             </a:extLst>
           </p:cNvPr>
@@ -5762,7 +5762,7 @@
           <p:cNvPr id="5" name="">
             <a:extLst xmlns:a="http://schemas.openxmlformats.org/drawingml/2006/main">
               <a:ext uri="{FF2B5EF4-FFF2-40B4-BE49-F238E27FC236}">
-                <a16:creationId xmlns:a16="http://schemas.microsoft.com/office/drawing/2014/main" id="{C85B507A-8EB6-4E0A-B0D4-ECA3A36668A6}"/>
+                <a16:creationId xmlns:a16="http://schemas.microsoft.com/office/drawing/2014/main" id="{953C4B5D-8B5D-472A-8783-A87C59B93AE7}"/>
               </a:ext>
             </a:extLst>
           </p:cNvPr>
@@ -5819,7 +5819,7 @@
           <p:cNvPr id="6" name="">
             <a:extLst xmlns:a="http://schemas.openxmlformats.org/drawingml/2006/main">
               <a:ext uri="{FF2B5EF4-FFF2-40B4-BE49-F238E27FC236}">
-                <a16:creationId xmlns:a16="http://schemas.microsoft.com/office/drawing/2014/main" id="{1BC6FD2C-D774-4926-854F-7A538517EE51}"/>
+                <a16:creationId xmlns:a16="http://schemas.microsoft.com/office/drawing/2014/main" id="{A1B3A957-36C3-4988-AE0D-2731EAB074EA}"/>
               </a:ext>
             </a:extLst>
           </p:cNvPr>
@@ -5876,7 +5876,7 @@
           <p:cNvPr id="7" name="">
             <a:extLst xmlns:a="http://schemas.openxmlformats.org/drawingml/2006/main">
               <a:ext uri="{FF2B5EF4-FFF2-40B4-BE49-F238E27FC236}">
-                <a16:creationId xmlns:a16="http://schemas.microsoft.com/office/drawing/2014/main" id="{A9395ED1-64BD-4956-8B10-C3CDC744AAD5}"/>
+                <a16:creationId xmlns:a16="http://schemas.microsoft.com/office/drawing/2014/main" id="{33C8D424-2AEE-48C0-B2CE-F64FFA5F1CF8}"/>
               </a:ext>
             </a:extLst>
           </p:cNvPr>
@@ -5908,7 +5908,7 @@
           <p:cNvPr id="8" name="">
             <a:extLst xmlns:a="http://schemas.openxmlformats.org/drawingml/2006/main">
               <a:ext uri="{FF2B5EF4-FFF2-40B4-BE49-F238E27FC236}">
-                <a16:creationId xmlns:a16="http://schemas.microsoft.com/office/drawing/2014/main" id="{2A1076D6-A8CB-44DA-8758-21038FB1F5F5}"/>
+                <a16:creationId xmlns:a16="http://schemas.microsoft.com/office/drawing/2014/main" id="{0309373E-4244-4CDC-AFD9-E4A749E59A2E}"/>
               </a:ext>
             </a:extLst>
           </p:cNvPr>
@@ -5965,7 +5965,7 @@
           <p:cNvPr id="9" name="">
             <a:extLst xmlns:a="http://schemas.openxmlformats.org/drawingml/2006/main">
               <a:ext uri="{FF2B5EF4-FFF2-40B4-BE49-F238E27FC236}">
-                <a16:creationId xmlns:a16="http://schemas.microsoft.com/office/drawing/2014/main" id="{EFBB3E41-ABE4-4EB9-9267-6880F0831F70}"/>
+                <a16:creationId xmlns:a16="http://schemas.microsoft.com/office/drawing/2014/main" id="{736A69A4-053E-4760-B969-1B3C9B9A7805}"/>
               </a:ext>
             </a:extLst>
           </p:cNvPr>
@@ -6022,7 +6022,7 @@
           <p:cNvPr id="10" name="">
             <a:extLst xmlns:a="http://schemas.openxmlformats.org/drawingml/2006/main">
               <a:ext uri="{FF2B5EF4-FFF2-40B4-BE49-F238E27FC236}">
-                <a16:creationId xmlns:a16="http://schemas.microsoft.com/office/drawing/2014/main" id="{5C12FC70-3BF0-46B4-BE5E-A65E5EE4FAC3}"/>
+                <a16:creationId xmlns:a16="http://schemas.microsoft.com/office/drawing/2014/main" id="{3BEFBBA5-C83C-434B-BA5C-BB2A44D1835C}"/>
               </a:ext>
             </a:extLst>
           </p:cNvPr>
@@ -6056,7 +6056,7 @@
           <p:cNvPr id="11" name="">
             <a:extLst xmlns:a="http://schemas.openxmlformats.org/drawingml/2006/main">
               <a:ext uri="{FF2B5EF4-FFF2-40B4-BE49-F238E27FC236}">
-                <a16:creationId xmlns:a16="http://schemas.microsoft.com/office/drawing/2014/main" id="{445A2664-4A6D-4E39-8C6B-64DDAC077179}"/>
+                <a16:creationId xmlns:a16="http://schemas.microsoft.com/office/drawing/2014/main" id="{1B071581-108D-4901-8798-12010100809D}"/>
               </a:ext>
             </a:extLst>
           </p:cNvPr>
@@ -6088,7 +6088,7 @@
           <p:cNvPr id="12" name="">
             <a:extLst xmlns:a="http://schemas.openxmlformats.org/drawingml/2006/main">
               <a:ext uri="{FF2B5EF4-FFF2-40B4-BE49-F238E27FC236}">
-                <a16:creationId xmlns:a16="http://schemas.microsoft.com/office/drawing/2014/main" id="{1171459F-A93A-4F7A-9827-9F30BD9E69E9}"/>
+                <a16:creationId xmlns:a16="http://schemas.microsoft.com/office/drawing/2014/main" id="{E0DFCA60-5B82-40A6-A8C7-EF0BB57C415F}"/>
               </a:ext>
             </a:extLst>
           </p:cNvPr>
@@ -6145,7 +6145,7 @@
           <p:cNvPr id="13" name="">
             <a:extLst xmlns:a="http://schemas.openxmlformats.org/drawingml/2006/main">
               <a:ext uri="{FF2B5EF4-FFF2-40B4-BE49-F238E27FC236}">
-                <a16:creationId xmlns:a16="http://schemas.microsoft.com/office/drawing/2014/main" id="{AEE93749-AF05-44D9-B441-A4767DFE04C3}"/>
+                <a16:creationId xmlns:a16="http://schemas.microsoft.com/office/drawing/2014/main" id="{F99EC268-B028-45D8-AB8F-A035EDA128E6}"/>
               </a:ext>
             </a:extLst>
           </p:cNvPr>
@@ -6202,7 +6202,7 @@
           <p:cNvPr id="14" name="">
             <a:extLst xmlns:a="http://schemas.openxmlformats.org/drawingml/2006/main">
               <a:ext uri="{FF2B5EF4-FFF2-40B4-BE49-F238E27FC236}">
-                <a16:creationId xmlns:a16="http://schemas.microsoft.com/office/drawing/2014/main" id="{EE61094E-A115-482C-A69E-F46BFA9C250F}"/>
+                <a16:creationId xmlns:a16="http://schemas.microsoft.com/office/drawing/2014/main" id="{17BE8F8C-178D-4EA2-A169-4D5531198CE8}"/>
               </a:ext>
             </a:extLst>
           </p:cNvPr>
@@ -6236,7 +6236,7 @@
           <p:cNvPr id="15" name="">
             <a:extLst xmlns:a="http://schemas.openxmlformats.org/drawingml/2006/main">
               <a:ext uri="{FF2B5EF4-FFF2-40B4-BE49-F238E27FC236}">
-                <a16:creationId xmlns:a16="http://schemas.microsoft.com/office/drawing/2014/main" id="{BA0A350D-3C4D-4543-93FA-9BFFB9DB6336}"/>
+                <a16:creationId xmlns:a16="http://schemas.microsoft.com/office/drawing/2014/main" id="{C45591E3-17F3-406C-AF1E-B67D1FCCB276}"/>
               </a:ext>
             </a:extLst>
           </p:cNvPr>
@@ -6268,7 +6268,7 @@
           <p:cNvPr id="16" name="">
             <a:extLst xmlns:a="http://schemas.openxmlformats.org/drawingml/2006/main">
               <a:ext uri="{FF2B5EF4-FFF2-40B4-BE49-F238E27FC236}">
-                <a16:creationId xmlns:a16="http://schemas.microsoft.com/office/drawing/2014/main" id="{35F1A556-FECE-45B5-9F19-F00E982ECCF9}"/>
+                <a16:creationId xmlns:a16="http://schemas.microsoft.com/office/drawing/2014/main" id="{C912D295-79A0-40F9-9051-18D9E63CD0B8}"/>
               </a:ext>
             </a:extLst>
           </p:cNvPr>
@@ -6325,7 +6325,7 @@
           <p:cNvPr id="17" name="">
             <a:extLst xmlns:a="http://schemas.openxmlformats.org/drawingml/2006/main">
               <a:ext uri="{FF2B5EF4-FFF2-40B4-BE49-F238E27FC236}">
-                <a16:creationId xmlns:a16="http://schemas.microsoft.com/office/drawing/2014/main" id="{586C2A05-88E9-400C-AFD8-5D1230CF0814}"/>
+                <a16:creationId xmlns:a16="http://schemas.microsoft.com/office/drawing/2014/main" id="{63C4AB2F-C3CB-4F43-B87A-A35CE284A6B7}"/>
               </a:ext>
             </a:extLst>
           </p:cNvPr>
@@ -6382,7 +6382,7 @@
           <p:cNvPr id="18" name="">
             <a:extLst xmlns:a="http://schemas.openxmlformats.org/drawingml/2006/main">
               <a:ext uri="{FF2B5EF4-FFF2-40B4-BE49-F238E27FC236}">
-                <a16:creationId xmlns:a16="http://schemas.microsoft.com/office/drawing/2014/main" id="{F94948E7-272D-4E07-B786-E81518D5A9CA}"/>
+                <a16:creationId xmlns:a16="http://schemas.microsoft.com/office/drawing/2014/main" id="{AE79E39F-D98C-41AD-B5E2-00C6E34351AF}"/>
               </a:ext>
             </a:extLst>
           </p:cNvPr>
@@ -6416,7 +6416,7 @@
           <p:cNvPr id="19" name="">
             <a:extLst xmlns:a="http://schemas.openxmlformats.org/drawingml/2006/main">
               <a:ext uri="{FF2B5EF4-FFF2-40B4-BE49-F238E27FC236}">
-                <a16:creationId xmlns:a16="http://schemas.microsoft.com/office/drawing/2014/main" id="{EA6C72A8-A886-4902-BEB6-61DB53D4870F}"/>
+                <a16:creationId xmlns:a16="http://schemas.microsoft.com/office/drawing/2014/main" id="{FC4599AD-240C-4BC2-BE2E-D499742447C7}"/>
               </a:ext>
             </a:extLst>
           </p:cNvPr>
@@ -6448,7 +6448,7 @@
           <p:cNvPr id="20" name="">
             <a:extLst xmlns:a="http://schemas.openxmlformats.org/drawingml/2006/main">
               <a:ext uri="{FF2B5EF4-FFF2-40B4-BE49-F238E27FC236}">
-                <a16:creationId xmlns:a16="http://schemas.microsoft.com/office/drawing/2014/main" id="{359B9ED0-9534-4F0E-8427-B4FE67D59A7C}"/>
+                <a16:creationId xmlns:a16="http://schemas.microsoft.com/office/drawing/2014/main" id="{AC920951-21E4-424F-A2D3-E9DC0692DF8D}"/>
               </a:ext>
             </a:extLst>
           </p:cNvPr>
@@ -6505,7 +6505,7 @@
           <p:cNvPr id="21" name="">
             <a:extLst xmlns:a="http://schemas.openxmlformats.org/drawingml/2006/main">
               <a:ext uri="{FF2B5EF4-FFF2-40B4-BE49-F238E27FC236}">
-                <a16:creationId xmlns:a16="http://schemas.microsoft.com/office/drawing/2014/main" id="{C1A71831-3F43-4182-AACE-5E409E2A89B0}"/>
+                <a16:creationId xmlns:a16="http://schemas.microsoft.com/office/drawing/2014/main" id="{2A108C95-0C9C-40A9-AB48-D29D5D773669}"/>
               </a:ext>
             </a:extLst>
           </p:cNvPr>
@@ -6562,7 +6562,7 @@
           <p:cNvPr id="22" name="">
             <a:extLst xmlns:a="http://schemas.openxmlformats.org/drawingml/2006/main">
               <a:ext uri="{FF2B5EF4-FFF2-40B4-BE49-F238E27FC236}">
-                <a16:creationId xmlns:a16="http://schemas.microsoft.com/office/drawing/2014/main" id="{59C0E245-DBC7-4378-A2FC-6908F4237BEF}"/>
+                <a16:creationId xmlns:a16="http://schemas.microsoft.com/office/drawing/2014/main" id="{90620199-6752-410D-B394-574A01A2F67B}"/>
               </a:ext>
             </a:extLst>
           </p:cNvPr>
@@ -6617,7 +6617,7 @@
     </p:spTree>
     <p:extLst>
       <p:ext uri="{BB962C8B-B14F-4D97-AF65-F5344CB8AC3E}">
-        <p14:creationId xmlns:p14="http://schemas.microsoft.com/office/powerpoint/2010/main" val="168152517"/>
+        <p14:creationId xmlns:p14="http://schemas.microsoft.com/office/powerpoint/2010/main" val="600846807"/>
       </p:ext>
     </p:extLst>
   </p:cSld>
@@ -6818,7 +6818,7 @@
           <p:cNvPr id="16" name="">
             <a:extLst xmlns:a="http://schemas.openxmlformats.org/drawingml/2006/main">
               <a:ext uri="{FF2B5EF4-FFF2-40B4-BE49-F238E27FC236}">
-                <a16:creationId xmlns:a16="http://schemas.microsoft.com/office/drawing/2014/main" id="{4C34668C-C22A-4E84-9A29-6E8B03E05A64}"/>
+                <a16:creationId xmlns:a16="http://schemas.microsoft.com/office/drawing/2014/main" id="{A4D5DB05-3305-42FD-985B-4E68E8F3153D}"/>
               </a:ext>
             </a:extLst>
           </p:cNvPr>
@@ -6850,7 +6850,7 @@
           <p:cNvPr id="2" name="">
             <a:extLst xmlns:a="http://schemas.openxmlformats.org/drawingml/2006/main">
               <a:ext uri="{FF2B5EF4-FFF2-40B4-BE49-F238E27FC236}">
-                <a16:creationId xmlns:a16="http://schemas.microsoft.com/office/drawing/2014/main" id="{0D38E9C0-3D31-4514-8CEE-82577E3BF0B8}"/>
+                <a16:creationId xmlns:a16="http://schemas.microsoft.com/office/drawing/2014/main" id="{B7EAB66A-0235-4812-A26B-1B02C7828887}"/>
               </a:ext>
             </a:extLst>
           </p:cNvPr>
@@ -6907,7 +6907,7 @@
           <p:cNvPr id="3" name="">
             <a:extLst xmlns:a="http://schemas.openxmlformats.org/drawingml/2006/main">
               <a:ext uri="{FF2B5EF4-FFF2-40B4-BE49-F238E27FC236}">
-                <a16:creationId xmlns:a16="http://schemas.microsoft.com/office/drawing/2014/main" id="{131031B5-85B4-467F-8893-11FF761A4643}"/>
+                <a16:creationId xmlns:a16="http://schemas.microsoft.com/office/drawing/2014/main" id="{7C3595A7-CD5F-4EFF-985C-E0E4EDA100E0}"/>
               </a:ext>
             </a:extLst>
           </p:cNvPr>
@@ -6939,7 +6939,7 @@
           <p:cNvPr id="4" name="">
             <a:extLst xmlns:a="http://schemas.openxmlformats.org/drawingml/2006/main">
               <a:ext uri="{FF2B5EF4-FFF2-40B4-BE49-F238E27FC236}">
-                <a16:creationId xmlns:a16="http://schemas.microsoft.com/office/drawing/2014/main" id="{7E55B419-A109-42B7-84AB-63ADCFBECB71}"/>
+                <a16:creationId xmlns:a16="http://schemas.microsoft.com/office/drawing/2014/main" id="{E5F7DB15-6E2B-4442-913E-87EE76784437}"/>
               </a:ext>
             </a:extLst>
           </p:cNvPr>
@@ -6996,7 +6996,7 @@
           <p:cNvPr id="5" name="">
             <a:extLst xmlns:a="http://schemas.openxmlformats.org/drawingml/2006/main">
               <a:ext uri="{FF2B5EF4-FFF2-40B4-BE49-F238E27FC236}">
-                <a16:creationId xmlns:a16="http://schemas.microsoft.com/office/drawing/2014/main" id="{6F14CFCF-ED28-4C3A-B23E-27A29A780963}"/>
+                <a16:creationId xmlns:a16="http://schemas.microsoft.com/office/drawing/2014/main" id="{D8CE47A8-5F4F-482E-9986-8B32228DF8A0}"/>
               </a:ext>
             </a:extLst>
           </p:cNvPr>
@@ -7053,7 +7053,7 @@
           <p:cNvPr id="6" name="">
             <a:extLst xmlns:a="http://schemas.openxmlformats.org/drawingml/2006/main">
               <a:ext uri="{FF2B5EF4-FFF2-40B4-BE49-F238E27FC236}">
-                <a16:creationId xmlns:a16="http://schemas.microsoft.com/office/drawing/2014/main" id="{005E1C9F-CAF1-4265-ACC3-E0B9E6128CA7}"/>
+                <a16:creationId xmlns:a16="http://schemas.microsoft.com/office/drawing/2014/main" id="{F1AF362E-D8D0-4312-B17B-8221622C8317}"/>
               </a:ext>
             </a:extLst>
           </p:cNvPr>
@@ -7110,7 +7110,7 @@
           <p:cNvPr id="7" name="">
             <a:extLst xmlns:a="http://schemas.openxmlformats.org/drawingml/2006/main">
               <a:ext uri="{FF2B5EF4-FFF2-40B4-BE49-F238E27FC236}">
-                <a16:creationId xmlns:a16="http://schemas.microsoft.com/office/drawing/2014/main" id="{04D780E3-12CE-4412-83B7-659084C6208A}"/>
+                <a16:creationId xmlns:a16="http://schemas.microsoft.com/office/drawing/2014/main" id="{C496BB55-7870-4EA7-8FC5-ED4F4C3900F8}"/>
               </a:ext>
             </a:extLst>
           </p:cNvPr>
@@ -7142,7 +7142,7 @@
           <p:cNvPr id="8" name="">
             <a:extLst xmlns:a="http://schemas.openxmlformats.org/drawingml/2006/main">
               <a:ext uri="{FF2B5EF4-FFF2-40B4-BE49-F238E27FC236}">
-                <a16:creationId xmlns:a16="http://schemas.microsoft.com/office/drawing/2014/main" id="{68D354E6-82EE-4930-B34B-B0262675D80E}"/>
+                <a16:creationId xmlns:a16="http://schemas.microsoft.com/office/drawing/2014/main" id="{F6A3BF79-94E9-44EF-89DF-EF407C76BEB2}"/>
               </a:ext>
             </a:extLst>
           </p:cNvPr>
@@ -7199,7 +7199,7 @@
           <p:cNvPr id="9" name="">
             <a:extLst xmlns:a="http://schemas.openxmlformats.org/drawingml/2006/main">
               <a:ext uri="{FF2B5EF4-FFF2-40B4-BE49-F238E27FC236}">
-                <a16:creationId xmlns:a16="http://schemas.microsoft.com/office/drawing/2014/main" id="{6698A2F6-7086-4797-AB57-C777B1FE4D10}"/>
+                <a16:creationId xmlns:a16="http://schemas.microsoft.com/office/drawing/2014/main" id="{826046C8-BA58-4591-9B5F-74ECF260D052}"/>
               </a:ext>
             </a:extLst>
           </p:cNvPr>
@@ -7256,7 +7256,7 @@
           <p:cNvPr id="10" name="">
             <a:extLst xmlns:a="http://schemas.openxmlformats.org/drawingml/2006/main">
               <a:ext uri="{FF2B5EF4-FFF2-40B4-BE49-F238E27FC236}">
-                <a16:creationId xmlns:a16="http://schemas.microsoft.com/office/drawing/2014/main" id="{7EA0AE08-EFB9-4E4F-BBC0-F507A11C5C50}"/>
+                <a16:creationId xmlns:a16="http://schemas.microsoft.com/office/drawing/2014/main" id="{BBA9E351-11F8-4849-8C44-F0EB8DA28669}"/>
               </a:ext>
             </a:extLst>
           </p:cNvPr>
@@ -7313,7 +7313,7 @@
           <p:cNvPr id="11" name="">
             <a:extLst xmlns:a="http://schemas.openxmlformats.org/drawingml/2006/main">
               <a:ext uri="{FF2B5EF4-FFF2-40B4-BE49-F238E27FC236}">
-                <a16:creationId xmlns:a16="http://schemas.microsoft.com/office/drawing/2014/main" id="{EAB36853-69BF-48F1-9563-84C7B46A3B6E}"/>
+                <a16:creationId xmlns:a16="http://schemas.microsoft.com/office/drawing/2014/main" id="{99281A46-522A-4390-8965-042FA0C655F3}"/>
               </a:ext>
             </a:extLst>
           </p:cNvPr>
@@ -7345,7 +7345,7 @@
           <p:cNvPr id="12" name="">
             <a:extLst xmlns:a="http://schemas.openxmlformats.org/drawingml/2006/main">
               <a:ext uri="{FF2B5EF4-FFF2-40B4-BE49-F238E27FC236}">
-                <a16:creationId xmlns:a16="http://schemas.microsoft.com/office/drawing/2014/main" id="{833382C7-7520-412E-88D7-2412C07265D7}"/>
+                <a16:creationId xmlns:a16="http://schemas.microsoft.com/office/drawing/2014/main" id="{AC2209C6-4A51-45AA-B04B-49EB6D3746D6}"/>
               </a:ext>
             </a:extLst>
           </p:cNvPr>
@@ -7402,7 +7402,7 @@
           <p:cNvPr id="13" name="">
             <a:extLst xmlns:a="http://schemas.openxmlformats.org/drawingml/2006/main">
               <a:ext uri="{FF2B5EF4-FFF2-40B4-BE49-F238E27FC236}">
-                <a16:creationId xmlns:a16="http://schemas.microsoft.com/office/drawing/2014/main" id="{B50966F1-DE37-41C2-9BEA-C9441BFDC13F}"/>
+                <a16:creationId xmlns:a16="http://schemas.microsoft.com/office/drawing/2014/main" id="{6C1F07B9-B421-49FB-B228-8E9718D630B5}"/>
               </a:ext>
             </a:extLst>
           </p:cNvPr>
@@ -7459,7 +7459,7 @@
           <p:cNvPr id="14" name="">
             <a:extLst xmlns:a="http://schemas.openxmlformats.org/drawingml/2006/main">
               <a:ext uri="{FF2B5EF4-FFF2-40B4-BE49-F238E27FC236}">
-                <a16:creationId xmlns:a16="http://schemas.microsoft.com/office/drawing/2014/main" id="{2A8FFD00-0795-487E-B6AE-9A715C0452EA}"/>
+                <a16:creationId xmlns:a16="http://schemas.microsoft.com/office/drawing/2014/main" id="{059C68CC-856B-4860-A687-3E855DB67B8F}"/>
               </a:ext>
             </a:extLst>
           </p:cNvPr>
@@ -7516,7 +7516,7 @@
           <p:cNvPr id="15" name="">
             <a:extLst xmlns:a="http://schemas.openxmlformats.org/drawingml/2006/main">
               <a:ext uri="{FF2B5EF4-FFF2-40B4-BE49-F238E27FC236}">
-                <a16:creationId xmlns:a16="http://schemas.microsoft.com/office/drawing/2014/main" id="{5EABD1FA-7E06-4DF7-AC08-BD31C17AABE7}"/>
+                <a16:creationId xmlns:a16="http://schemas.microsoft.com/office/drawing/2014/main" id="{8029C8EC-1573-4F88-9ED7-FC02AEE25A02}"/>
               </a:ext>
             </a:extLst>
           </p:cNvPr>
@@ -7571,7 +7571,7 @@
     </p:spTree>
     <p:extLst>
       <p:ext uri="{BB962C8B-B14F-4D97-AF65-F5344CB8AC3E}">
-        <p14:creationId xmlns:p14="http://schemas.microsoft.com/office/powerpoint/2010/main" val="1395899308"/>
+        <p14:creationId xmlns:p14="http://schemas.microsoft.com/office/powerpoint/2010/main" val="1702403022"/>
       </p:ext>
     </p:extLst>
   </p:cSld>
@@ -7772,7 +7772,7 @@
           <p:cNvPr id="23" name="">
             <a:extLst xmlns:a="http://schemas.openxmlformats.org/drawingml/2006/main">
               <a:ext uri="{FF2B5EF4-FFF2-40B4-BE49-F238E27FC236}">
-                <a16:creationId xmlns:a16="http://schemas.microsoft.com/office/drawing/2014/main" id="{4178CBB7-8415-4384-9B8F-93F6DE53EC29}"/>
+                <a16:creationId xmlns:a16="http://schemas.microsoft.com/office/drawing/2014/main" id="{C32157F6-09C3-4BDD-9246-80F3D552FFC7}"/>
               </a:ext>
             </a:extLst>
           </p:cNvPr>
@@ -7804,7 +7804,7 @@
           <p:cNvPr id="2" name="">
             <a:extLst xmlns:a="http://schemas.openxmlformats.org/drawingml/2006/main">
               <a:ext uri="{FF2B5EF4-FFF2-40B4-BE49-F238E27FC236}">
-                <a16:creationId xmlns:a16="http://schemas.microsoft.com/office/drawing/2014/main" id="{BCAF8E25-365B-4103-93E5-724833E61465}"/>
+                <a16:creationId xmlns:a16="http://schemas.microsoft.com/office/drawing/2014/main" id="{8C8EBC35-2811-467E-BF36-FF6C0A2834A5}"/>
               </a:ext>
             </a:extLst>
           </p:cNvPr>
@@ -7861,7 +7861,7 @@
           <p:cNvPr id="3" name="">
             <a:extLst xmlns:a="http://schemas.openxmlformats.org/drawingml/2006/main">
               <a:ext uri="{FF2B5EF4-FFF2-40B4-BE49-F238E27FC236}">
-                <a16:creationId xmlns:a16="http://schemas.microsoft.com/office/drawing/2014/main" id="{C8FEB16D-542D-46EB-A878-68BF0A6E9A41}"/>
+                <a16:creationId xmlns:a16="http://schemas.microsoft.com/office/drawing/2014/main" id="{D9A701FF-99DE-411F-ABEF-89CDBE8C5F53}"/>
               </a:ext>
             </a:extLst>
           </p:cNvPr>
@@ -7893,7 +7893,7 @@
           <p:cNvPr id="4" name="">
             <a:extLst xmlns:a="http://schemas.openxmlformats.org/drawingml/2006/main">
               <a:ext uri="{FF2B5EF4-FFF2-40B4-BE49-F238E27FC236}">
-                <a16:creationId xmlns:a16="http://schemas.microsoft.com/office/drawing/2014/main" id="{D45706A4-6212-4E1E-816D-80290D887C05}"/>
+                <a16:creationId xmlns:a16="http://schemas.microsoft.com/office/drawing/2014/main" id="{07B5B7B8-7C62-4093-90B8-6A548D18C5C5}"/>
               </a:ext>
             </a:extLst>
           </p:cNvPr>
@@ -7950,7 +7950,7 @@
           <p:cNvPr id="5" name="">
             <a:extLst xmlns:a="http://schemas.openxmlformats.org/drawingml/2006/main">
               <a:ext uri="{FF2B5EF4-FFF2-40B4-BE49-F238E27FC236}">
-                <a16:creationId xmlns:a16="http://schemas.microsoft.com/office/drawing/2014/main" id="{01E11FA2-8DEA-4D70-A043-AFA5A1ECE9C4}"/>
+                <a16:creationId xmlns:a16="http://schemas.microsoft.com/office/drawing/2014/main" id="{8A94E944-22A2-4CA5-8F46-E080BBDDB7C5}"/>
               </a:ext>
             </a:extLst>
           </p:cNvPr>
@@ -8007,7 +8007,7 @@
           <p:cNvPr id="6" name="">
             <a:extLst xmlns:a="http://schemas.openxmlformats.org/drawingml/2006/main">
               <a:ext uri="{FF2B5EF4-FFF2-40B4-BE49-F238E27FC236}">
-                <a16:creationId xmlns:a16="http://schemas.microsoft.com/office/drawing/2014/main" id="{40022008-E625-4568-9DF3-F5B7BB2AD7CE}"/>
+                <a16:creationId xmlns:a16="http://schemas.microsoft.com/office/drawing/2014/main" id="{6873D0CB-2033-426E-B2D1-7A793E2C1906}"/>
               </a:ext>
             </a:extLst>
           </p:cNvPr>
@@ -8064,7 +8064,7 @@
           <p:cNvPr id="7" name="">
             <a:extLst xmlns:a="http://schemas.openxmlformats.org/drawingml/2006/main">
               <a:ext uri="{FF2B5EF4-FFF2-40B4-BE49-F238E27FC236}">
-                <a16:creationId xmlns:a16="http://schemas.microsoft.com/office/drawing/2014/main" id="{DCF18137-DB35-47D6-A318-FE14D25E7E55}"/>
+                <a16:creationId xmlns:a16="http://schemas.microsoft.com/office/drawing/2014/main" id="{07A6A70A-CD26-4A30-9C23-10E7B6C1FCBB}"/>
               </a:ext>
             </a:extLst>
           </p:cNvPr>
@@ -8096,7 +8096,7 @@
           <p:cNvPr id="8" name="">
             <a:extLst xmlns:a="http://schemas.openxmlformats.org/drawingml/2006/main">
               <a:ext uri="{FF2B5EF4-FFF2-40B4-BE49-F238E27FC236}">
-                <a16:creationId xmlns:a16="http://schemas.microsoft.com/office/drawing/2014/main" id="{FB1B8631-2F5C-464C-854E-0AADEE8FE94C}"/>
+                <a16:creationId xmlns:a16="http://schemas.microsoft.com/office/drawing/2014/main" id="{DBDB665F-7F29-47D2-B2DA-A0EA5A99804A}"/>
               </a:ext>
             </a:extLst>
           </p:cNvPr>
@@ -8153,7 +8153,7 @@
           <p:cNvPr id="9" name="">
             <a:extLst xmlns:a="http://schemas.openxmlformats.org/drawingml/2006/main">
               <a:ext uri="{FF2B5EF4-FFF2-40B4-BE49-F238E27FC236}">
-                <a16:creationId xmlns:a16="http://schemas.microsoft.com/office/drawing/2014/main" id="{38478306-71A4-47FE-BA03-AE2866B1A3A9}"/>
+                <a16:creationId xmlns:a16="http://schemas.microsoft.com/office/drawing/2014/main" id="{A0C9FA2B-B644-4CEB-B93E-00BA7E81D0B8}"/>
               </a:ext>
             </a:extLst>
           </p:cNvPr>
@@ -8210,19 +8210,19 @@
           <p:cNvPr id="10" name="">
             <a:extLst xmlns:a="http://schemas.openxmlformats.org/drawingml/2006/main">
               <a:ext uri="{FF2B5EF4-FFF2-40B4-BE49-F238E27FC236}">
-                <a16:creationId xmlns:a16="http://schemas.microsoft.com/office/drawing/2014/main" id="{50DC3DA5-3FDE-439C-A30E-0509B30D86C8}"/>
-              </a:ext>
-            </a:extLst>
-          </p:cNvPr>
-          <p:cNvSpPr>
-            <a:spLocks xmlns:a="http://schemas.openxmlformats.org/drawingml/2006/main" noGrp="1"/>
-          </p:cNvSpPr>
-          <p:nvPr/>
-        </p:nvSpPr>
-        <p:spPr>
-          <a:xfrm xmlns:a="http://schemas.openxmlformats.org/drawingml/2006/main">
-            <a:off x="914400" y="1257300"/>
-            <a:ext cx="10363200" cy="781050"/>
+                <a16:creationId xmlns:a16="http://schemas.microsoft.com/office/drawing/2014/main" id="{DD978F53-81CD-4011-B8C8-16D3D7364B2A}"/>
+              </a:ext>
+            </a:extLst>
+          </p:cNvPr>
+          <p:cNvSpPr>
+            <a:spLocks xmlns:a="http://schemas.openxmlformats.org/drawingml/2006/main" noGrp="1"/>
+          </p:cNvSpPr>
+          <p:nvPr/>
+        </p:nvSpPr>
+        <p:spPr>
+          <a:xfrm xmlns:a="http://schemas.openxmlformats.org/drawingml/2006/main">
+            <a:off x="857250" y="1219200"/>
+            <a:ext cx="10477500" cy="742950"/>
           </a:xfrm>
           <a:prstGeom xmlns:a="http://schemas.openxmlformats.org/drawingml/2006/main" prst="rect">
             <a:avLst/>
@@ -8239,7 +8239,7 @@
           <a:lstStyle xmlns:a="http://schemas.openxmlformats.org/drawingml/2006/main"/>
           <a:p xmlns:a="http://schemas.openxmlformats.org/drawingml/2006/main">
             <a:pPr algn="ctr">
-              <a:defRPr sz="2175" b="1">
+              <a:defRPr sz="2100" b="1">
                 <a:solidFill>
                   <a:srgbClr val="17253A"/>
                 </a:solidFill>
@@ -8249,7 +8249,7 @@
               </a:defRPr>
             </a:pPr>
             <a:r>
-              <a:rPr sz="2175" b="1">
+              <a:rPr sz="2100" b="1">
                 <a:solidFill>
                   <a:srgbClr val="17253A"/>
                 </a:solidFill>
@@ -8267,28 +8267,30 @@
           <p:cNvPr id="11" name="">
             <a:extLst xmlns:a="http://schemas.openxmlformats.org/drawingml/2006/main">
               <a:ext uri="{FF2B5EF4-FFF2-40B4-BE49-F238E27FC236}">
-                <a16:creationId xmlns:a16="http://schemas.microsoft.com/office/drawing/2014/main" id="{A9187BB0-8634-4A4C-9DCD-7C4D3E67111F}"/>
-              </a:ext>
-            </a:extLst>
-          </p:cNvPr>
-          <p:cNvSpPr>
-            <a:spLocks xmlns:a="http://schemas.openxmlformats.org/drawingml/2006/main" noGrp="1"/>
-          </p:cNvSpPr>
-          <p:nvPr/>
-        </p:nvSpPr>
-        <p:spPr>
-          <a:xfrm xmlns:a="http://schemas.openxmlformats.org/drawingml/2006/main">
-            <a:off x="1000125" y="2247900"/>
-            <a:ext cx="476250" cy="476250"/>
-          </a:xfrm>
-          <a:prstGeom xmlns:a="http://schemas.openxmlformats.org/drawingml/2006/main" prst="ellipse">
+                <a16:creationId xmlns:a16="http://schemas.microsoft.com/office/drawing/2014/main" id="{BA64A40C-6B3D-4204-A9EC-C2428A27496C}"/>
+              </a:ext>
+            </a:extLst>
+          </p:cNvPr>
+          <p:cNvSpPr>
+            <a:spLocks xmlns:a="http://schemas.openxmlformats.org/drawingml/2006/main" noGrp="1"/>
+          </p:cNvSpPr>
+          <p:nvPr/>
+        </p:nvSpPr>
+        <p:spPr>
+          <a:xfrm xmlns:a="http://schemas.openxmlformats.org/drawingml/2006/main">
+            <a:off x="971550" y="2124075"/>
+            <a:ext cx="38100" cy="3524250"/>
+          </a:xfrm>
+          <a:prstGeom xmlns:a="http://schemas.openxmlformats.org/drawingml/2006/main" prst="rect">
             <a:avLst/>
           </a:prstGeom>
           <a:solidFill xmlns:a="http://schemas.openxmlformats.org/drawingml/2006/main">
-            <a:srgbClr val="18324A"/>
+            <a:srgbClr val="2C6E73"/>
           </a:solidFill>
           <a:ln xmlns:a="http://schemas.openxmlformats.org/drawingml/2006/main" w="0">
-            <a:noFill/>
+            <a:solidFill>
+              <a:srgbClr val="2C6E73"/>
+            </a:solidFill>
           </a:ln>
         </p:spPr>
       </p:sp>
@@ -8297,19 +8299,19 @@
           <p:cNvPr id="12" name="">
             <a:extLst xmlns:a="http://schemas.openxmlformats.org/drawingml/2006/main">
               <a:ext uri="{FF2B5EF4-FFF2-40B4-BE49-F238E27FC236}">
-                <a16:creationId xmlns:a16="http://schemas.microsoft.com/office/drawing/2014/main" id="{FDB78F76-A4F0-4318-A4EA-7F01C1D70C11}"/>
-              </a:ext>
-            </a:extLst>
-          </p:cNvPr>
-          <p:cNvSpPr>
-            <a:spLocks xmlns:a="http://schemas.openxmlformats.org/drawingml/2006/main" noGrp="1"/>
-          </p:cNvSpPr>
-          <p:nvPr/>
-        </p:nvSpPr>
-        <p:spPr>
-          <a:xfrm xmlns:a="http://schemas.openxmlformats.org/drawingml/2006/main">
-            <a:off x="1000125" y="2276475"/>
-            <a:ext cx="476250" cy="419100"/>
+                <a16:creationId xmlns:a16="http://schemas.microsoft.com/office/drawing/2014/main" id="{B79A7A79-9D7E-4B21-85AB-B41CF7CF0057}"/>
+              </a:ext>
+            </a:extLst>
+          </p:cNvPr>
+          <p:cNvSpPr>
+            <a:spLocks xmlns:a="http://schemas.openxmlformats.org/drawingml/2006/main" noGrp="1"/>
+          </p:cNvSpPr>
+          <p:nvPr/>
+        </p:nvSpPr>
+        <p:spPr>
+          <a:xfrm xmlns:a="http://schemas.openxmlformats.org/drawingml/2006/main">
+            <a:off x="1162050" y="2200275"/>
+            <a:ext cx="400050" cy="400050"/>
           </a:xfrm>
           <a:prstGeom xmlns:a="http://schemas.openxmlformats.org/drawingml/2006/main" prst="rect">
             <a:avLst/>
@@ -8326,9 +8328,9 @@
           <a:lstStyle xmlns:a="http://schemas.openxmlformats.org/drawingml/2006/main"/>
           <a:p xmlns:a="http://schemas.openxmlformats.org/drawingml/2006/main">
             <a:pPr algn="ctr">
-              <a:defRPr sz="1350" b="1">
-                <a:solidFill>
-                  <a:srgbClr val="FFFFFF"/>
+              <a:defRPr sz="1125" b="1">
+                <a:solidFill>
+                  <a:srgbClr val="2C6E73"/>
                 </a:solidFill>
                 <a:latin typeface="Arial"/>
                 <a:ea typeface="Arial"/>
@@ -8336,9 +8338,9 @@
               </a:defRPr>
             </a:pPr>
             <a:r>
-              <a:rPr sz="1350" b="1">
-                <a:solidFill>
-                  <a:srgbClr val="FFFFFF"/>
+              <a:rPr sz="1125" b="1">
+                <a:solidFill>
+                  <a:srgbClr val="2C6E73"/>
                 </a:solidFill>
                 <a:latin typeface="Arial"/>
                 <a:ea typeface="Arial"/>
@@ -8354,19 +8356,19 @@
           <p:cNvPr id="13" name="">
             <a:extLst xmlns:a="http://schemas.openxmlformats.org/drawingml/2006/main">
               <a:ext uri="{FF2B5EF4-FFF2-40B4-BE49-F238E27FC236}">
-                <a16:creationId xmlns:a16="http://schemas.microsoft.com/office/drawing/2014/main" id="{7EF5A310-DEC6-4697-998F-021CEA8E734B}"/>
-              </a:ext>
-            </a:extLst>
-          </p:cNvPr>
-          <p:cNvSpPr>
-            <a:spLocks xmlns:a="http://schemas.openxmlformats.org/drawingml/2006/main" noGrp="1"/>
-          </p:cNvSpPr>
-          <p:nvPr/>
-        </p:nvSpPr>
-        <p:spPr>
-          <a:xfrm xmlns:a="http://schemas.openxmlformats.org/drawingml/2006/main">
-            <a:off x="1714500" y="2181225"/>
-            <a:ext cx="9429750" cy="609600"/>
+                <a16:creationId xmlns:a16="http://schemas.microsoft.com/office/drawing/2014/main" id="{870BE90F-9B91-48F8-A306-64A1C74098E8}"/>
+              </a:ext>
+            </a:extLst>
+          </p:cNvPr>
+          <p:cNvSpPr>
+            <a:spLocks xmlns:a="http://schemas.openxmlformats.org/drawingml/2006/main" noGrp="1"/>
+          </p:cNvSpPr>
+          <p:nvPr/>
+        </p:nvSpPr>
+        <p:spPr>
+          <a:xfrm xmlns:a="http://schemas.openxmlformats.org/drawingml/2006/main">
+            <a:off x="1714500" y="2114550"/>
+            <a:ext cx="9525000" cy="809625"/>
           </a:xfrm>
           <a:prstGeom xmlns:a="http://schemas.openxmlformats.org/drawingml/2006/main" prst="rect">
             <a:avLst/>
@@ -8383,7 +8385,7 @@
           <a:lstStyle xmlns:a="http://schemas.openxmlformats.org/drawingml/2006/main"/>
           <a:p xmlns:a="http://schemas.openxmlformats.org/drawingml/2006/main">
             <a:pPr algn="l">
-              <a:defRPr sz="1500" b="0">
+              <a:defRPr sz="1725" b="0">
                 <a:solidFill>
                   <a:srgbClr val="17253A"/>
                 </a:solidFill>
@@ -8393,7 +8395,7 @@
               </a:defRPr>
             </a:pPr>
             <a:r>
-              <a:rPr sz="1500" b="0">
+              <a:rPr sz="1725" b="0">
                 <a:solidFill>
                   <a:srgbClr val="17253A"/>
                 </a:solidFill>
@@ -8401,7 +8403,7 @@
                 <a:ea typeface="Arial"/>
                 <a:cs typeface="Arial"/>
               </a:rPr>
-              <a:t>Identify the structure: Identify the domain and retrieve the relevant representation or method.</a:t>
+              <a:t>3/4 kg for 6 people</a:t>
             </a:r>
           </a:p>
         </p:txBody>
@@ -8411,28 +8413,30 @@
           <p:cNvPr id="14" name="">
             <a:extLst xmlns:a="http://schemas.openxmlformats.org/drawingml/2006/main">
               <a:ext uri="{FF2B5EF4-FFF2-40B4-BE49-F238E27FC236}">
-                <a16:creationId xmlns:a16="http://schemas.microsoft.com/office/drawing/2014/main" id="{373BC4D1-3793-4178-879B-A690CFE712F3}"/>
-              </a:ext>
-            </a:extLst>
-          </p:cNvPr>
-          <p:cNvSpPr>
-            <a:spLocks xmlns:a="http://schemas.openxmlformats.org/drawingml/2006/main" noGrp="1"/>
-          </p:cNvSpPr>
-          <p:nvPr/>
-        </p:nvSpPr>
-        <p:spPr>
-          <a:xfrm xmlns:a="http://schemas.openxmlformats.org/drawingml/2006/main">
-            <a:off x="1000125" y="2990850"/>
-            <a:ext cx="476250" cy="476250"/>
-          </a:xfrm>
-          <a:prstGeom xmlns:a="http://schemas.openxmlformats.org/drawingml/2006/main" prst="ellipse">
+                <a16:creationId xmlns:a16="http://schemas.microsoft.com/office/drawing/2014/main" id="{E636C53E-D0F6-41E0-B4CE-FCA9A9E0316E}"/>
+              </a:ext>
+            </a:extLst>
+          </p:cNvPr>
+          <p:cNvSpPr>
+            <a:spLocks xmlns:a="http://schemas.openxmlformats.org/drawingml/2006/main" noGrp="1"/>
+          </p:cNvSpPr>
+          <p:nvPr/>
+        </p:nvSpPr>
+        <p:spPr>
+          <a:xfrm xmlns:a="http://schemas.openxmlformats.org/drawingml/2006/main">
+            <a:off x="1714500" y="2943225"/>
+            <a:ext cx="9334500" cy="9525"/>
+          </a:xfrm>
+          <a:prstGeom xmlns:a="http://schemas.openxmlformats.org/drawingml/2006/main" prst="rect">
             <a:avLst/>
           </a:prstGeom>
           <a:solidFill xmlns:a="http://schemas.openxmlformats.org/drawingml/2006/main">
-            <a:srgbClr val="2C6E73"/>
+            <a:srgbClr val="D9E0E6"/>
           </a:solidFill>
           <a:ln xmlns:a="http://schemas.openxmlformats.org/drawingml/2006/main" w="0">
-            <a:noFill/>
+            <a:solidFill>
+              <a:srgbClr val="D9E0E6"/>
+            </a:solidFill>
           </a:ln>
         </p:spPr>
       </p:sp>
@@ -8441,19 +8445,19 @@
           <p:cNvPr id="15" name="">
             <a:extLst xmlns:a="http://schemas.openxmlformats.org/drawingml/2006/main">
               <a:ext uri="{FF2B5EF4-FFF2-40B4-BE49-F238E27FC236}">
-                <a16:creationId xmlns:a16="http://schemas.microsoft.com/office/drawing/2014/main" id="{3E727D21-BB73-4134-8B5D-8FC27DF55959}"/>
-              </a:ext>
-            </a:extLst>
-          </p:cNvPr>
-          <p:cNvSpPr>
-            <a:spLocks xmlns:a="http://schemas.openxmlformats.org/drawingml/2006/main" noGrp="1"/>
-          </p:cNvSpPr>
-          <p:nvPr/>
-        </p:nvSpPr>
-        <p:spPr>
-          <a:xfrm xmlns:a="http://schemas.openxmlformats.org/drawingml/2006/main">
-            <a:off x="1000125" y="3019425"/>
-            <a:ext cx="476250" cy="419100"/>
+                <a16:creationId xmlns:a16="http://schemas.microsoft.com/office/drawing/2014/main" id="{E68FFFB5-68B9-4ACD-B674-8A5481674EB0}"/>
+              </a:ext>
+            </a:extLst>
+          </p:cNvPr>
+          <p:cNvSpPr>
+            <a:spLocks xmlns:a="http://schemas.openxmlformats.org/drawingml/2006/main" noGrp="1"/>
+          </p:cNvSpPr>
+          <p:nvPr/>
+        </p:nvSpPr>
+        <p:spPr>
+          <a:xfrm xmlns:a="http://schemas.openxmlformats.org/drawingml/2006/main">
+            <a:off x="1162050" y="3076575"/>
+            <a:ext cx="400050" cy="400050"/>
           </a:xfrm>
           <a:prstGeom xmlns:a="http://schemas.openxmlformats.org/drawingml/2006/main" prst="rect">
             <a:avLst/>
@@ -8470,9 +8474,9 @@
           <a:lstStyle xmlns:a="http://schemas.openxmlformats.org/drawingml/2006/main"/>
           <a:p xmlns:a="http://schemas.openxmlformats.org/drawingml/2006/main">
             <a:pPr algn="ctr">
-              <a:defRPr sz="1350" b="1">
-                <a:solidFill>
-                  <a:srgbClr val="FFFFFF"/>
+              <a:defRPr sz="1125" b="1">
+                <a:solidFill>
+                  <a:srgbClr val="2C6E73"/>
                 </a:solidFill>
                 <a:latin typeface="Arial"/>
                 <a:ea typeface="Arial"/>
@@ -8480,9 +8484,9 @@
               </a:defRPr>
             </a:pPr>
             <a:r>
-              <a:rPr sz="1350" b="1">
-                <a:solidFill>
-                  <a:srgbClr val="FFFFFF"/>
+              <a:rPr sz="1125" b="1">
+                <a:solidFill>
+                  <a:srgbClr val="2C6E73"/>
                 </a:solidFill>
                 <a:latin typeface="Arial"/>
                 <a:ea typeface="Arial"/>
@@ -8498,19 +8502,19 @@
           <p:cNvPr id="16" name="">
             <a:extLst xmlns:a="http://schemas.openxmlformats.org/drawingml/2006/main">
               <a:ext uri="{FF2B5EF4-FFF2-40B4-BE49-F238E27FC236}">
-                <a16:creationId xmlns:a16="http://schemas.microsoft.com/office/drawing/2014/main" id="{3AD088F3-63E1-4FF3-AFA5-ED29520A8FEE}"/>
-              </a:ext>
-            </a:extLst>
-          </p:cNvPr>
-          <p:cNvSpPr>
-            <a:spLocks xmlns:a="http://schemas.openxmlformats.org/drawingml/2006/main" noGrp="1"/>
-          </p:cNvSpPr>
-          <p:nvPr/>
-        </p:nvSpPr>
-        <p:spPr>
-          <a:xfrm xmlns:a="http://schemas.openxmlformats.org/drawingml/2006/main">
-            <a:off x="1714500" y="2924175"/>
-            <a:ext cx="9429750" cy="609600"/>
+                <a16:creationId xmlns:a16="http://schemas.microsoft.com/office/drawing/2014/main" id="{31C71301-351C-480A-A4C1-98B9233B2AE4}"/>
+              </a:ext>
+            </a:extLst>
+          </p:cNvPr>
+          <p:cNvSpPr>
+            <a:spLocks xmlns:a="http://schemas.openxmlformats.org/drawingml/2006/main" noGrp="1"/>
+          </p:cNvSpPr>
+          <p:nvPr/>
+        </p:nvSpPr>
+        <p:spPr>
+          <a:xfrm xmlns:a="http://schemas.openxmlformats.org/drawingml/2006/main">
+            <a:off x="1714500" y="2990850"/>
+            <a:ext cx="9525000" cy="809625"/>
           </a:xfrm>
           <a:prstGeom xmlns:a="http://schemas.openxmlformats.org/drawingml/2006/main" prst="rect">
             <a:avLst/>
@@ -8527,7 +8531,7 @@
           <a:lstStyle xmlns:a="http://schemas.openxmlformats.org/drawingml/2006/main"/>
           <a:p xmlns:a="http://schemas.openxmlformats.org/drawingml/2006/main">
             <a:pPr algn="l">
-              <a:defRPr sz="1500" b="0">
+              <a:defRPr sz="1725" b="0">
                 <a:solidFill>
                   <a:srgbClr val="17253A"/>
                 </a:solidFill>
@@ -8537,7 +8541,7 @@
               </a:defRPr>
             </a:pPr>
             <a:r>
-              <a:rPr sz="1500" b="0">
+              <a:rPr sz="1725" b="0">
                 <a:solidFill>
                   <a:srgbClr val="17253A"/>
                 </a:solidFill>
@@ -8545,7 +8549,7 @@
                 <a:ea typeface="Arial"/>
                 <a:cs typeface="Arial"/>
               </a:rPr>
-              <a:t>Set up the method: Show a complete calculation with precise vocabulary.</a:t>
+              <a:t>For 1 person: 3/4 ÷ 6 = 1/8 kg</a:t>
             </a:r>
           </a:p>
         </p:txBody>
@@ -8555,28 +8559,30 @@
           <p:cNvPr id="17" name="">
             <a:extLst xmlns:a="http://schemas.openxmlformats.org/drawingml/2006/main">
               <a:ext uri="{FF2B5EF4-FFF2-40B4-BE49-F238E27FC236}">
-                <a16:creationId xmlns:a16="http://schemas.microsoft.com/office/drawing/2014/main" id="{A02B8A74-7176-4D9D-BF47-63E3B0F4DDD3}"/>
-              </a:ext>
-            </a:extLst>
-          </p:cNvPr>
-          <p:cNvSpPr>
-            <a:spLocks xmlns:a="http://schemas.openxmlformats.org/drawingml/2006/main" noGrp="1"/>
-          </p:cNvSpPr>
-          <p:nvPr/>
-        </p:nvSpPr>
-        <p:spPr>
-          <a:xfrm xmlns:a="http://schemas.openxmlformats.org/drawingml/2006/main">
-            <a:off x="1000125" y="3733800"/>
-            <a:ext cx="476250" cy="476250"/>
-          </a:xfrm>
-          <a:prstGeom xmlns:a="http://schemas.openxmlformats.org/drawingml/2006/main" prst="ellipse">
+                <a16:creationId xmlns:a16="http://schemas.microsoft.com/office/drawing/2014/main" id="{CF2E1057-D704-4034-8185-67552217AE03}"/>
+              </a:ext>
+            </a:extLst>
+          </p:cNvPr>
+          <p:cNvSpPr>
+            <a:spLocks xmlns:a="http://schemas.openxmlformats.org/drawingml/2006/main" noGrp="1"/>
+          </p:cNvSpPr>
+          <p:nvPr/>
+        </p:nvSpPr>
+        <p:spPr>
+          <a:xfrm xmlns:a="http://schemas.openxmlformats.org/drawingml/2006/main">
+            <a:off x="1714500" y="3819525"/>
+            <a:ext cx="9334500" cy="9525"/>
+          </a:xfrm>
+          <a:prstGeom xmlns:a="http://schemas.openxmlformats.org/drawingml/2006/main" prst="rect">
             <a:avLst/>
           </a:prstGeom>
           <a:solidFill xmlns:a="http://schemas.openxmlformats.org/drawingml/2006/main">
-            <a:srgbClr val="2C6E73"/>
+            <a:srgbClr val="D9E0E6"/>
           </a:solidFill>
           <a:ln xmlns:a="http://schemas.openxmlformats.org/drawingml/2006/main" w="0">
-            <a:noFill/>
+            <a:solidFill>
+              <a:srgbClr val="D9E0E6"/>
+            </a:solidFill>
           </a:ln>
         </p:spPr>
       </p:sp>
@@ -8585,19 +8591,19 @@
           <p:cNvPr id="18" name="">
             <a:extLst xmlns:a="http://schemas.openxmlformats.org/drawingml/2006/main">
               <a:ext uri="{FF2B5EF4-FFF2-40B4-BE49-F238E27FC236}">
-                <a16:creationId xmlns:a16="http://schemas.microsoft.com/office/drawing/2014/main" id="{032EE528-48F9-4296-8902-2FD8FD46C8F9}"/>
-              </a:ext>
-            </a:extLst>
-          </p:cNvPr>
-          <p:cNvSpPr>
-            <a:spLocks xmlns:a="http://schemas.openxmlformats.org/drawingml/2006/main" noGrp="1"/>
-          </p:cNvSpPr>
-          <p:nvPr/>
-        </p:nvSpPr>
-        <p:spPr>
-          <a:xfrm xmlns:a="http://schemas.openxmlformats.org/drawingml/2006/main">
-            <a:off x="1000125" y="3762375"/>
-            <a:ext cx="476250" cy="419100"/>
+                <a16:creationId xmlns:a16="http://schemas.microsoft.com/office/drawing/2014/main" id="{72706835-40C9-4DC7-A342-995E7F55957F}"/>
+              </a:ext>
+            </a:extLst>
+          </p:cNvPr>
+          <p:cNvSpPr>
+            <a:spLocks xmlns:a="http://schemas.openxmlformats.org/drawingml/2006/main" noGrp="1"/>
+          </p:cNvSpPr>
+          <p:nvPr/>
+        </p:nvSpPr>
+        <p:spPr>
+          <a:xfrm xmlns:a="http://schemas.openxmlformats.org/drawingml/2006/main">
+            <a:off x="1162050" y="3952875"/>
+            <a:ext cx="400050" cy="400050"/>
           </a:xfrm>
           <a:prstGeom xmlns:a="http://schemas.openxmlformats.org/drawingml/2006/main" prst="rect">
             <a:avLst/>
@@ -8614,9 +8620,9 @@
           <a:lstStyle xmlns:a="http://schemas.openxmlformats.org/drawingml/2006/main"/>
           <a:p xmlns:a="http://schemas.openxmlformats.org/drawingml/2006/main">
             <a:pPr algn="ctr">
-              <a:defRPr sz="1350" b="1">
-                <a:solidFill>
-                  <a:srgbClr val="FFFFFF"/>
+              <a:defRPr sz="1125" b="1">
+                <a:solidFill>
+                  <a:srgbClr val="2C6E73"/>
                 </a:solidFill>
                 <a:latin typeface="Arial"/>
                 <a:ea typeface="Arial"/>
@@ -8624,9 +8630,9 @@
               </a:defRPr>
             </a:pPr>
             <a:r>
-              <a:rPr sz="1350" b="1">
-                <a:solidFill>
-                  <a:srgbClr val="FFFFFF"/>
+              <a:rPr sz="1125" b="1">
+                <a:solidFill>
+                  <a:srgbClr val="2C6E73"/>
                 </a:solidFill>
                 <a:latin typeface="Arial"/>
                 <a:ea typeface="Arial"/>
@@ -8642,19 +8648,19 @@
           <p:cNvPr id="19" name="">
             <a:extLst xmlns:a="http://schemas.openxmlformats.org/drawingml/2006/main">
               <a:ext uri="{FF2B5EF4-FFF2-40B4-BE49-F238E27FC236}">
-                <a16:creationId xmlns:a16="http://schemas.microsoft.com/office/drawing/2014/main" id="{D6A1DF4A-6D96-4164-A2AD-F7EABB822D3D}"/>
-              </a:ext>
-            </a:extLst>
-          </p:cNvPr>
-          <p:cNvSpPr>
-            <a:spLocks xmlns:a="http://schemas.openxmlformats.org/drawingml/2006/main" noGrp="1"/>
-          </p:cNvSpPr>
-          <p:nvPr/>
-        </p:nvSpPr>
-        <p:spPr>
-          <a:xfrm xmlns:a="http://schemas.openxmlformats.org/drawingml/2006/main">
-            <a:off x="1714500" y="3667125"/>
-            <a:ext cx="9429750" cy="609600"/>
+                <a16:creationId xmlns:a16="http://schemas.microsoft.com/office/drawing/2014/main" id="{321FE142-51C1-49F1-A05A-1DEBA585538C}"/>
+              </a:ext>
+            </a:extLst>
+          </p:cNvPr>
+          <p:cNvSpPr>
+            <a:spLocks xmlns:a="http://schemas.openxmlformats.org/drawingml/2006/main" noGrp="1"/>
+          </p:cNvSpPr>
+          <p:nvPr/>
+        </p:nvSpPr>
+        <p:spPr>
+          <a:xfrm xmlns:a="http://schemas.openxmlformats.org/drawingml/2006/main">
+            <a:off x="1714500" y="3867150"/>
+            <a:ext cx="9525000" cy="809625"/>
           </a:xfrm>
           <a:prstGeom xmlns:a="http://schemas.openxmlformats.org/drawingml/2006/main" prst="rect">
             <a:avLst/>
@@ -8671,7 +8677,7 @@
           <a:lstStyle xmlns:a="http://schemas.openxmlformats.org/drawingml/2006/main"/>
           <a:p xmlns:a="http://schemas.openxmlformats.org/drawingml/2006/main">
             <a:pPr algn="l">
-              <a:defRPr sz="1500" b="0">
+              <a:defRPr sz="1725" b="0">
                 <a:solidFill>
                   <a:srgbClr val="17253A"/>
                 </a:solidFill>
@@ -8681,7 +8687,7 @@
               </a:defRPr>
             </a:pPr>
             <a:r>
-              <a:rPr sz="1500" b="0">
+              <a:rPr sz="1725" b="0">
                 <a:solidFill>
                   <a:srgbClr val="17253A"/>
                 </a:solidFill>
@@ -8689,7 +8695,7 @@
                 <a:ea typeface="Arial"/>
                 <a:cs typeface="Arial"/>
               </a:rPr>
-              <a:t>Complete the calculation: 1 3/4 kg.</a:t>
+              <a:t>For 14 people: 14 × 1/8 = 14/8</a:t>
             </a:r>
           </a:p>
         </p:txBody>
@@ -8699,28 +8705,30 @@
           <p:cNvPr id="20" name="">
             <a:extLst xmlns:a="http://schemas.openxmlformats.org/drawingml/2006/main">
               <a:ext uri="{FF2B5EF4-FFF2-40B4-BE49-F238E27FC236}">
-                <a16:creationId xmlns:a16="http://schemas.microsoft.com/office/drawing/2014/main" id="{1BBD86E0-3F5D-4600-95C2-E7AFFB8A6EFA}"/>
-              </a:ext>
-            </a:extLst>
-          </p:cNvPr>
-          <p:cNvSpPr>
-            <a:spLocks xmlns:a="http://schemas.openxmlformats.org/drawingml/2006/main" noGrp="1"/>
-          </p:cNvSpPr>
-          <p:nvPr/>
-        </p:nvSpPr>
-        <p:spPr>
-          <a:xfrm xmlns:a="http://schemas.openxmlformats.org/drawingml/2006/main">
-            <a:off x="1000125" y="4476750"/>
-            <a:ext cx="476250" cy="476250"/>
-          </a:xfrm>
-          <a:prstGeom xmlns:a="http://schemas.openxmlformats.org/drawingml/2006/main" prst="ellipse">
+                <a16:creationId xmlns:a16="http://schemas.microsoft.com/office/drawing/2014/main" id="{2A5832CE-DAF5-4BA1-9A94-67E043FC17B8}"/>
+              </a:ext>
+            </a:extLst>
+          </p:cNvPr>
+          <p:cNvSpPr>
+            <a:spLocks xmlns:a="http://schemas.openxmlformats.org/drawingml/2006/main" noGrp="1"/>
+          </p:cNvSpPr>
+          <p:nvPr/>
+        </p:nvSpPr>
+        <p:spPr>
+          <a:xfrm xmlns:a="http://schemas.openxmlformats.org/drawingml/2006/main">
+            <a:off x="1714500" y="4695825"/>
+            <a:ext cx="9334500" cy="9525"/>
+          </a:xfrm>
+          <a:prstGeom xmlns:a="http://schemas.openxmlformats.org/drawingml/2006/main" prst="rect">
             <a:avLst/>
           </a:prstGeom>
           <a:solidFill xmlns:a="http://schemas.openxmlformats.org/drawingml/2006/main">
-            <a:srgbClr val="2C6E73"/>
+            <a:srgbClr val="D9E0E6"/>
           </a:solidFill>
           <a:ln xmlns:a="http://schemas.openxmlformats.org/drawingml/2006/main" w="0">
-            <a:noFill/>
+            <a:solidFill>
+              <a:srgbClr val="D9E0E6"/>
+            </a:solidFill>
           </a:ln>
         </p:spPr>
       </p:sp>
@@ -8729,19 +8737,19 @@
           <p:cNvPr id="21" name="">
             <a:extLst xmlns:a="http://schemas.openxmlformats.org/drawingml/2006/main">
               <a:ext uri="{FF2B5EF4-FFF2-40B4-BE49-F238E27FC236}">
-                <a16:creationId xmlns:a16="http://schemas.microsoft.com/office/drawing/2014/main" id="{61356C72-9961-419E-97E7-C003AAA3B7EA}"/>
-              </a:ext>
-            </a:extLst>
-          </p:cNvPr>
-          <p:cNvSpPr>
-            <a:spLocks xmlns:a="http://schemas.openxmlformats.org/drawingml/2006/main" noGrp="1"/>
-          </p:cNvSpPr>
-          <p:nvPr/>
-        </p:nvSpPr>
-        <p:spPr>
-          <a:xfrm xmlns:a="http://schemas.openxmlformats.org/drawingml/2006/main">
-            <a:off x="1000125" y="4505325"/>
-            <a:ext cx="476250" cy="419100"/>
+                <a16:creationId xmlns:a16="http://schemas.microsoft.com/office/drawing/2014/main" id="{E7FDFA05-E160-4149-ADB0-C5A2EF828529}"/>
+              </a:ext>
+            </a:extLst>
+          </p:cNvPr>
+          <p:cNvSpPr>
+            <a:spLocks xmlns:a="http://schemas.openxmlformats.org/drawingml/2006/main" noGrp="1"/>
+          </p:cNvSpPr>
+          <p:nvPr/>
+        </p:nvSpPr>
+        <p:spPr>
+          <a:xfrm xmlns:a="http://schemas.openxmlformats.org/drawingml/2006/main">
+            <a:off x="1162050" y="4829175"/>
+            <a:ext cx="400050" cy="400050"/>
           </a:xfrm>
           <a:prstGeom xmlns:a="http://schemas.openxmlformats.org/drawingml/2006/main" prst="rect">
             <a:avLst/>
@@ -8758,9 +8766,9 @@
           <a:lstStyle xmlns:a="http://schemas.openxmlformats.org/drawingml/2006/main"/>
           <a:p xmlns:a="http://schemas.openxmlformats.org/drawingml/2006/main">
             <a:pPr algn="ctr">
-              <a:defRPr sz="1350" b="1">
-                <a:solidFill>
-                  <a:srgbClr val="FFFFFF"/>
+              <a:defRPr sz="1125" b="1">
+                <a:solidFill>
+                  <a:srgbClr val="2F785D"/>
                 </a:solidFill>
                 <a:latin typeface="Arial"/>
                 <a:ea typeface="Arial"/>
@@ -8768,9 +8776,9 @@
               </a:defRPr>
             </a:pPr>
             <a:r>
-              <a:rPr sz="1350" b="1">
-                <a:solidFill>
-                  <a:srgbClr val="FFFFFF"/>
+              <a:rPr sz="1125" b="1">
+                <a:solidFill>
+                  <a:srgbClr val="2F785D"/>
                 </a:solidFill>
                 <a:latin typeface="Arial"/>
                 <a:ea typeface="Arial"/>
@@ -8786,19 +8794,19 @@
           <p:cNvPr id="22" name="">
             <a:extLst xmlns:a="http://schemas.openxmlformats.org/drawingml/2006/main">
               <a:ext uri="{FF2B5EF4-FFF2-40B4-BE49-F238E27FC236}">
-                <a16:creationId xmlns:a16="http://schemas.microsoft.com/office/drawing/2014/main" id="{A2A561F2-E08A-4139-903E-39349147F7D1}"/>
-              </a:ext>
-            </a:extLst>
-          </p:cNvPr>
-          <p:cNvSpPr>
-            <a:spLocks xmlns:a="http://schemas.openxmlformats.org/drawingml/2006/main" noGrp="1"/>
-          </p:cNvSpPr>
-          <p:nvPr/>
-        </p:nvSpPr>
-        <p:spPr>
-          <a:xfrm xmlns:a="http://schemas.openxmlformats.org/drawingml/2006/main">
-            <a:off x="1714500" y="4410075"/>
-            <a:ext cx="9429750" cy="609600"/>
+                <a16:creationId xmlns:a16="http://schemas.microsoft.com/office/drawing/2014/main" id="{1CB6BF31-04FF-4E52-A5A1-31AC07DE613B}"/>
+              </a:ext>
+            </a:extLst>
+          </p:cNvPr>
+          <p:cNvSpPr>
+            <a:spLocks xmlns:a="http://schemas.openxmlformats.org/drawingml/2006/main" noGrp="1"/>
+          </p:cNvSpPr>
+          <p:nvPr/>
+        </p:nvSpPr>
+        <p:spPr>
+          <a:xfrm xmlns:a="http://schemas.openxmlformats.org/drawingml/2006/main">
+            <a:off x="1714500" y="4743450"/>
+            <a:ext cx="9525000" cy="809625"/>
           </a:xfrm>
           <a:prstGeom xmlns:a="http://schemas.openxmlformats.org/drawingml/2006/main" prst="rect">
             <a:avLst/>
@@ -8815,7 +8823,7 @@
           <a:lstStyle xmlns:a="http://schemas.openxmlformats.org/drawingml/2006/main"/>
           <a:p xmlns:a="http://schemas.openxmlformats.org/drawingml/2006/main">
             <a:pPr algn="l">
-              <a:defRPr sz="1500" b="1">
+              <a:defRPr sz="1725" b="1">
                 <a:solidFill>
                   <a:srgbClr val="2F785D"/>
                 </a:solidFill>
@@ -8825,7 +8833,7 @@
               </a:defRPr>
             </a:pPr>
             <a:r>
-              <a:rPr sz="1500" b="1">
+              <a:rPr sz="1725" b="1">
                 <a:solidFill>
                   <a:srgbClr val="2F785D"/>
                 </a:solidFill>
@@ -8833,7 +8841,7 @@
                 <a:ea typeface="Arial"/>
                 <a:cs typeface="Arial"/>
               </a:rPr>
-              <a:t>Check the result: Check the result and record a specific next step.</a:t>
+              <a:t>14/8 = 1 3/4 kg</a:t>
             </a:r>
           </a:p>
         </p:txBody>
@@ -8841,7 +8849,7 @@
     </p:spTree>
     <p:extLst>
       <p:ext uri="{BB962C8B-B14F-4D97-AF65-F5344CB8AC3E}">
-        <p14:creationId xmlns:p14="http://schemas.microsoft.com/office/powerpoint/2010/main" val="431409792"/>
+        <p14:creationId xmlns:p14="http://schemas.microsoft.com/office/powerpoint/2010/main" val="770451158"/>
       </p:ext>
     </p:extLst>
   </p:cSld>
@@ -9134,7 +9142,7 @@
           <p:cNvPr id="15" name="">
             <a:extLst xmlns:a="http://schemas.openxmlformats.org/drawingml/2006/main">
               <a:ext uri="{FF2B5EF4-FFF2-40B4-BE49-F238E27FC236}">
-                <a16:creationId xmlns:a16="http://schemas.microsoft.com/office/drawing/2014/main" id="{65A55E80-E651-4728-9ACB-675FEBA0A506}"/>
+                <a16:creationId xmlns:a16="http://schemas.microsoft.com/office/drawing/2014/main" id="{FFA19D0E-ACA9-4139-A9AA-8E8AD67567DA}"/>
               </a:ext>
             </a:extLst>
           </p:cNvPr>
@@ -9166,7 +9174,7 @@
           <p:cNvPr id="2" name="">
             <a:extLst xmlns:a="http://schemas.openxmlformats.org/drawingml/2006/main">
               <a:ext uri="{FF2B5EF4-FFF2-40B4-BE49-F238E27FC236}">
-                <a16:creationId xmlns:a16="http://schemas.microsoft.com/office/drawing/2014/main" id="{40F4F190-1219-4600-A44F-272806E1F85E}"/>
+                <a16:creationId xmlns:a16="http://schemas.microsoft.com/office/drawing/2014/main" id="{4FD9D7C7-5852-411B-A719-77D5A2ACAFE6}"/>
               </a:ext>
             </a:extLst>
           </p:cNvPr>
@@ -9223,7 +9231,7 @@
           <p:cNvPr id="3" name="">
             <a:extLst xmlns:a="http://schemas.openxmlformats.org/drawingml/2006/main">
               <a:ext uri="{FF2B5EF4-FFF2-40B4-BE49-F238E27FC236}">
-                <a16:creationId xmlns:a16="http://schemas.microsoft.com/office/drawing/2014/main" id="{20E4E504-6FE8-4A6F-A5AE-CEAD360F8527}"/>
+                <a16:creationId xmlns:a16="http://schemas.microsoft.com/office/drawing/2014/main" id="{2FF6BBF8-7D18-4AEA-9FBE-269F2C726FBB}"/>
               </a:ext>
             </a:extLst>
           </p:cNvPr>
@@ -9255,7 +9263,7 @@
           <p:cNvPr id="4" name="">
             <a:extLst xmlns:a="http://schemas.openxmlformats.org/drawingml/2006/main">
               <a:ext uri="{FF2B5EF4-FFF2-40B4-BE49-F238E27FC236}">
-                <a16:creationId xmlns:a16="http://schemas.microsoft.com/office/drawing/2014/main" id="{EAA9FB41-5564-4D4C-B85B-B510906733FA}"/>
+                <a16:creationId xmlns:a16="http://schemas.microsoft.com/office/drawing/2014/main" id="{54479D76-9671-498D-9792-FFFDFCB0E120}"/>
               </a:ext>
             </a:extLst>
           </p:cNvPr>
@@ -9312,7 +9320,7 @@
           <p:cNvPr id="5" name="">
             <a:extLst xmlns:a="http://schemas.openxmlformats.org/drawingml/2006/main">
               <a:ext uri="{FF2B5EF4-FFF2-40B4-BE49-F238E27FC236}">
-                <a16:creationId xmlns:a16="http://schemas.microsoft.com/office/drawing/2014/main" id="{26D9AF51-37D0-44B0-A97F-506FA6423985}"/>
+                <a16:creationId xmlns:a16="http://schemas.microsoft.com/office/drawing/2014/main" id="{A36DEA3C-AA7E-4A23-848F-41018F622CC1}"/>
               </a:ext>
             </a:extLst>
           </p:cNvPr>
@@ -9369,7 +9377,7 @@
           <p:cNvPr id="6" name="">
             <a:extLst xmlns:a="http://schemas.openxmlformats.org/drawingml/2006/main">
               <a:ext uri="{FF2B5EF4-FFF2-40B4-BE49-F238E27FC236}">
-                <a16:creationId xmlns:a16="http://schemas.microsoft.com/office/drawing/2014/main" id="{A6F3A20D-DBAA-4D1B-A179-01A27FED572B}"/>
+                <a16:creationId xmlns:a16="http://schemas.microsoft.com/office/drawing/2014/main" id="{695A2DF3-7023-4A77-9B40-C11AD21B9798}"/>
               </a:ext>
             </a:extLst>
           </p:cNvPr>
@@ -9426,7 +9434,7 @@
           <p:cNvPr id="7" name="">
             <a:extLst xmlns:a="http://schemas.openxmlformats.org/drawingml/2006/main">
               <a:ext uri="{FF2B5EF4-FFF2-40B4-BE49-F238E27FC236}">
-                <a16:creationId xmlns:a16="http://schemas.microsoft.com/office/drawing/2014/main" id="{31590962-1156-4B8C-AACC-8AF6536EF0CD}"/>
+                <a16:creationId xmlns:a16="http://schemas.microsoft.com/office/drawing/2014/main" id="{938ABABA-8558-4E4F-AD34-0E60836CAED4}"/>
               </a:ext>
             </a:extLst>
           </p:cNvPr>
@@ -9458,7 +9466,7 @@
           <p:cNvPr id="8" name="">
             <a:extLst xmlns:a="http://schemas.openxmlformats.org/drawingml/2006/main">
               <a:ext uri="{FF2B5EF4-FFF2-40B4-BE49-F238E27FC236}">
-                <a16:creationId xmlns:a16="http://schemas.microsoft.com/office/drawing/2014/main" id="{89CE4E1B-DFEF-4D99-AC72-3F7E3590BE6E}"/>
+                <a16:creationId xmlns:a16="http://schemas.microsoft.com/office/drawing/2014/main" id="{E270704C-1A95-42AB-9173-1E04EE6E921F}"/>
               </a:ext>
             </a:extLst>
           </p:cNvPr>
@@ -9515,7 +9523,7 @@
           <p:cNvPr id="9" name="">
             <a:extLst xmlns:a="http://schemas.openxmlformats.org/drawingml/2006/main">
               <a:ext uri="{FF2B5EF4-FFF2-40B4-BE49-F238E27FC236}">
-                <a16:creationId xmlns:a16="http://schemas.microsoft.com/office/drawing/2014/main" id="{D3E03425-5B36-4ADE-9359-15F53254D3E3}"/>
+                <a16:creationId xmlns:a16="http://schemas.microsoft.com/office/drawing/2014/main" id="{39DF3834-9E55-446B-B0AD-C14631A4C730}"/>
               </a:ext>
             </a:extLst>
           </p:cNvPr>
@@ -9572,7 +9580,7 @@
           <p:cNvPr id="10" name="">
             <a:extLst xmlns:a="http://schemas.openxmlformats.org/drawingml/2006/main">
               <a:ext uri="{FF2B5EF4-FFF2-40B4-BE49-F238E27FC236}">
-                <a16:creationId xmlns:a16="http://schemas.microsoft.com/office/drawing/2014/main" id="{078DFDF3-1E66-4DA3-8C4E-100B4772E38F}"/>
+                <a16:creationId xmlns:a16="http://schemas.microsoft.com/office/drawing/2014/main" id="{25B8DA34-69B9-47AF-8964-08A322F4574A}"/>
               </a:ext>
             </a:extLst>
           </p:cNvPr>
@@ -9629,7 +9637,7 @@
           <p:cNvPr id="11" name="">
             <a:extLst xmlns:a="http://schemas.openxmlformats.org/drawingml/2006/main">
               <a:ext uri="{FF2B5EF4-FFF2-40B4-BE49-F238E27FC236}">
-                <a16:creationId xmlns:a16="http://schemas.microsoft.com/office/drawing/2014/main" id="{EFDE1916-75B1-418E-9DBF-B57AFFDC2231}"/>
+                <a16:creationId xmlns:a16="http://schemas.microsoft.com/office/drawing/2014/main" id="{6C2FA8CF-439B-4317-A8C4-ABB2275B4CB3}"/>
               </a:ext>
             </a:extLst>
           </p:cNvPr>
@@ -9686,7 +9694,7 @@
           <p:cNvPr id="12" name="">
             <a:extLst xmlns:a="http://schemas.openxmlformats.org/drawingml/2006/main">
               <a:ext uri="{FF2B5EF4-FFF2-40B4-BE49-F238E27FC236}">
-                <a16:creationId xmlns:a16="http://schemas.microsoft.com/office/drawing/2014/main" id="{52665136-3198-40A5-98B1-F5B615E8A184}"/>
+                <a16:creationId xmlns:a16="http://schemas.microsoft.com/office/drawing/2014/main" id="{D1F44AB9-87CB-479C-8C6C-38A77F4940FD}"/>
               </a:ext>
             </a:extLst>
           </p:cNvPr>
@@ -9718,7 +9726,7 @@
           <p:cNvPr id="13" name="">
             <a:extLst xmlns:a="http://schemas.openxmlformats.org/drawingml/2006/main">
               <a:ext uri="{FF2B5EF4-FFF2-40B4-BE49-F238E27FC236}">
-                <a16:creationId xmlns:a16="http://schemas.microsoft.com/office/drawing/2014/main" id="{71B417B8-42E1-4EF6-8CDB-E5892059FA84}"/>
+                <a16:creationId xmlns:a16="http://schemas.microsoft.com/office/drawing/2014/main" id="{E36117B2-EDAF-41E9-A29B-ADFE1B2A4046}"/>
               </a:ext>
             </a:extLst>
           </p:cNvPr>
@@ -9775,7 +9783,7 @@
           <p:cNvPr id="14" name="">
             <a:extLst xmlns:a="http://schemas.openxmlformats.org/drawingml/2006/main">
               <a:ext uri="{FF2B5EF4-FFF2-40B4-BE49-F238E27FC236}">
-                <a16:creationId xmlns:a16="http://schemas.microsoft.com/office/drawing/2014/main" id="{90A181AB-647D-40F1-9324-FE273F8439DE}"/>
+                <a16:creationId xmlns:a16="http://schemas.microsoft.com/office/drawing/2014/main" id="{03200E33-7DFA-4860-8795-5711383952D1}"/>
               </a:ext>
             </a:extLst>
           </p:cNvPr>
@@ -9830,7 +9838,7 @@
     </p:spTree>
     <p:extLst>
       <p:ext uri="{BB962C8B-B14F-4D97-AF65-F5344CB8AC3E}">
-        <p14:creationId xmlns:p14="http://schemas.microsoft.com/office/powerpoint/2010/main" val="1956065403"/>
+        <p14:creationId xmlns:p14="http://schemas.microsoft.com/office/powerpoint/2010/main" val="1167161625"/>
       </p:ext>
     </p:extLst>
   </p:cSld>
@@ -10031,7 +10039,7 @@
           <p:cNvPr id="16" name="">
             <a:extLst xmlns:a="http://schemas.openxmlformats.org/drawingml/2006/main">
               <a:ext uri="{FF2B5EF4-FFF2-40B4-BE49-F238E27FC236}">
-                <a16:creationId xmlns:a16="http://schemas.microsoft.com/office/drawing/2014/main" id="{DFF65B5A-6386-46F4-A8AC-383B7FA42FEC}"/>
+                <a16:creationId xmlns:a16="http://schemas.microsoft.com/office/drawing/2014/main" id="{2D132D28-9E41-40FA-95C8-7E80370EC363}"/>
               </a:ext>
             </a:extLst>
           </p:cNvPr>
@@ -10063,7 +10071,7 @@
           <p:cNvPr id="2" name="">
             <a:extLst xmlns:a="http://schemas.openxmlformats.org/drawingml/2006/main">
               <a:ext uri="{FF2B5EF4-FFF2-40B4-BE49-F238E27FC236}">
-                <a16:creationId xmlns:a16="http://schemas.microsoft.com/office/drawing/2014/main" id="{140980D1-6E5A-4BBB-9120-354A370D1ABF}"/>
+                <a16:creationId xmlns:a16="http://schemas.microsoft.com/office/drawing/2014/main" id="{6FFC38C0-32B4-4A20-9A4D-B2DE7E2BBA2B}"/>
               </a:ext>
             </a:extLst>
           </p:cNvPr>
@@ -10120,7 +10128,7 @@
           <p:cNvPr id="3" name="">
             <a:extLst xmlns:a="http://schemas.openxmlformats.org/drawingml/2006/main">
               <a:ext uri="{FF2B5EF4-FFF2-40B4-BE49-F238E27FC236}">
-                <a16:creationId xmlns:a16="http://schemas.microsoft.com/office/drawing/2014/main" id="{1D168CC8-45FF-4106-938E-23FC234271E8}"/>
+                <a16:creationId xmlns:a16="http://schemas.microsoft.com/office/drawing/2014/main" id="{515883C4-E7D1-41A4-BAE4-48008A0C8838}"/>
               </a:ext>
             </a:extLst>
           </p:cNvPr>
@@ -10152,7 +10160,7 @@
           <p:cNvPr id="4" name="">
             <a:extLst xmlns:a="http://schemas.openxmlformats.org/drawingml/2006/main">
               <a:ext uri="{FF2B5EF4-FFF2-40B4-BE49-F238E27FC236}">
-                <a16:creationId xmlns:a16="http://schemas.microsoft.com/office/drawing/2014/main" id="{88AD4BBC-0D26-4A99-8438-351CFF37E911}"/>
+                <a16:creationId xmlns:a16="http://schemas.microsoft.com/office/drawing/2014/main" id="{F912CF52-4F6A-469E-AC26-F05069F17F07}"/>
               </a:ext>
             </a:extLst>
           </p:cNvPr>
@@ -10209,7 +10217,7 @@
           <p:cNvPr id="5" name="">
             <a:extLst xmlns:a="http://schemas.openxmlformats.org/drawingml/2006/main">
               <a:ext uri="{FF2B5EF4-FFF2-40B4-BE49-F238E27FC236}">
-                <a16:creationId xmlns:a16="http://schemas.microsoft.com/office/drawing/2014/main" id="{F34B431C-2397-4354-872F-D8FDFB2EA645}"/>
+                <a16:creationId xmlns:a16="http://schemas.microsoft.com/office/drawing/2014/main" id="{4F9D7E59-E4E2-4D97-8A71-1BF228B545D0}"/>
               </a:ext>
             </a:extLst>
           </p:cNvPr>
@@ -10266,7 +10274,7 @@
           <p:cNvPr id="6" name="">
             <a:extLst xmlns:a="http://schemas.openxmlformats.org/drawingml/2006/main">
               <a:ext uri="{FF2B5EF4-FFF2-40B4-BE49-F238E27FC236}">
-                <a16:creationId xmlns:a16="http://schemas.microsoft.com/office/drawing/2014/main" id="{D72FFC5C-9008-4552-89B4-B049136E800A}"/>
+                <a16:creationId xmlns:a16="http://schemas.microsoft.com/office/drawing/2014/main" id="{7FCF1775-D184-4EB9-A090-15F70151BC12}"/>
               </a:ext>
             </a:extLst>
           </p:cNvPr>
@@ -10323,7 +10331,7 @@
           <p:cNvPr id="7" name="">
             <a:extLst xmlns:a="http://schemas.openxmlformats.org/drawingml/2006/main">
               <a:ext uri="{FF2B5EF4-FFF2-40B4-BE49-F238E27FC236}">
-                <a16:creationId xmlns:a16="http://schemas.microsoft.com/office/drawing/2014/main" id="{F681A92E-34FE-42E4-A895-E662C6C0FFF5}"/>
+                <a16:creationId xmlns:a16="http://schemas.microsoft.com/office/drawing/2014/main" id="{A12CCC2B-ECEB-4B44-934F-C1AB9B5054F4}"/>
               </a:ext>
             </a:extLst>
           </p:cNvPr>
@@ -10355,7 +10363,7 @@
           <p:cNvPr id="8" name="">
             <a:extLst xmlns:a="http://schemas.openxmlformats.org/drawingml/2006/main">
               <a:ext uri="{FF2B5EF4-FFF2-40B4-BE49-F238E27FC236}">
-                <a16:creationId xmlns:a16="http://schemas.microsoft.com/office/drawing/2014/main" id="{2AF0B625-C7CE-4AF0-8E7F-3E77073DE960}"/>
+                <a16:creationId xmlns:a16="http://schemas.microsoft.com/office/drawing/2014/main" id="{F90EB100-9B4F-4973-89BB-96514E7A991D}"/>
               </a:ext>
             </a:extLst>
           </p:cNvPr>
@@ -10412,7 +10420,7 @@
           <p:cNvPr id="9" name="">
             <a:extLst xmlns:a="http://schemas.openxmlformats.org/drawingml/2006/main">
               <a:ext uri="{FF2B5EF4-FFF2-40B4-BE49-F238E27FC236}">
-                <a16:creationId xmlns:a16="http://schemas.microsoft.com/office/drawing/2014/main" id="{C3F8F96F-432A-497C-B232-00CBDBACA601}"/>
+                <a16:creationId xmlns:a16="http://schemas.microsoft.com/office/drawing/2014/main" id="{9ABB5C43-3F02-4BCB-AB60-47EA5A5E59F3}"/>
               </a:ext>
             </a:extLst>
           </p:cNvPr>
@@ -10469,7 +10477,7 @@
           <p:cNvPr id="10" name="">
             <a:extLst xmlns:a="http://schemas.openxmlformats.org/drawingml/2006/main">
               <a:ext uri="{FF2B5EF4-FFF2-40B4-BE49-F238E27FC236}">
-                <a16:creationId xmlns:a16="http://schemas.microsoft.com/office/drawing/2014/main" id="{CF3FBB9D-280E-472D-9A61-C5C16D9A79D7}"/>
+                <a16:creationId xmlns:a16="http://schemas.microsoft.com/office/drawing/2014/main" id="{3532BF10-7B44-4285-A84E-68DF60CDE859}"/>
               </a:ext>
             </a:extLst>
           </p:cNvPr>
@@ -10526,7 +10534,7 @@
           <p:cNvPr id="11" name="">
             <a:extLst xmlns:a="http://schemas.openxmlformats.org/drawingml/2006/main">
               <a:ext uri="{FF2B5EF4-FFF2-40B4-BE49-F238E27FC236}">
-                <a16:creationId xmlns:a16="http://schemas.microsoft.com/office/drawing/2014/main" id="{29879607-67B5-4264-988B-5E7F9AB0E674}"/>
+                <a16:creationId xmlns:a16="http://schemas.microsoft.com/office/drawing/2014/main" id="{D44B4361-A383-4AC4-B82E-E709F2840781}"/>
               </a:ext>
             </a:extLst>
           </p:cNvPr>
@@ -10583,7 +10591,7 @@
           <p:cNvPr id="12" name="">
             <a:extLst xmlns:a="http://schemas.openxmlformats.org/drawingml/2006/main">
               <a:ext uri="{FF2B5EF4-FFF2-40B4-BE49-F238E27FC236}">
-                <a16:creationId xmlns:a16="http://schemas.microsoft.com/office/drawing/2014/main" id="{5752839F-9213-4A40-8B3E-9490CAFC018B}"/>
+                <a16:creationId xmlns:a16="http://schemas.microsoft.com/office/drawing/2014/main" id="{7A36DA7B-E5B4-4A06-9B0B-A37A7C8F19A0}"/>
               </a:ext>
             </a:extLst>
           </p:cNvPr>
@@ -10640,7 +10648,7 @@
           <p:cNvPr id="13" name="">
             <a:extLst xmlns:a="http://schemas.openxmlformats.org/drawingml/2006/main">
               <a:ext uri="{FF2B5EF4-FFF2-40B4-BE49-F238E27FC236}">
-                <a16:creationId xmlns:a16="http://schemas.microsoft.com/office/drawing/2014/main" id="{FEB82DC5-B901-4A5D-B218-E723B983BEE6}"/>
+                <a16:creationId xmlns:a16="http://schemas.microsoft.com/office/drawing/2014/main" id="{B8FA7DBB-2394-40A6-A285-AC5C107CD347}"/>
               </a:ext>
             </a:extLst>
           </p:cNvPr>
@@ -10697,7 +10705,7 @@
           <p:cNvPr id="14" name="">
             <a:extLst xmlns:a="http://schemas.openxmlformats.org/drawingml/2006/main">
               <a:ext uri="{FF2B5EF4-FFF2-40B4-BE49-F238E27FC236}">
-                <a16:creationId xmlns:a16="http://schemas.microsoft.com/office/drawing/2014/main" id="{6EECB11A-178F-4411-B77F-DE967A6A2977}"/>
+                <a16:creationId xmlns:a16="http://schemas.microsoft.com/office/drawing/2014/main" id="{665C41CE-F244-46FE-9698-BBD49A85112A}"/>
               </a:ext>
             </a:extLst>
           </p:cNvPr>
@@ -10754,7 +10762,7 @@
           <p:cNvPr id="15" name="">
             <a:extLst xmlns:a="http://schemas.openxmlformats.org/drawingml/2006/main">
               <a:ext uri="{FF2B5EF4-FFF2-40B4-BE49-F238E27FC236}">
-                <a16:creationId xmlns:a16="http://schemas.microsoft.com/office/drawing/2014/main" id="{DFC21B6F-D5AD-45C7-ACC8-BEE8A5F3FB9C}"/>
+                <a16:creationId xmlns:a16="http://schemas.microsoft.com/office/drawing/2014/main" id="{6EF663A3-E031-457F-819F-1384F0433C38}"/>
               </a:ext>
             </a:extLst>
           </p:cNvPr>
@@ -10809,7 +10817,7 @@
     </p:spTree>
     <p:extLst>
       <p:ext uri="{BB962C8B-B14F-4D97-AF65-F5344CB8AC3E}">
-        <p14:creationId xmlns:p14="http://schemas.microsoft.com/office/powerpoint/2010/main" val="1999798835"/>
+        <p14:creationId xmlns:p14="http://schemas.microsoft.com/office/powerpoint/2010/main" val="44381141"/>
       </p:ext>
     </p:extLst>
   </p:cSld>
@@ -10964,7 +10972,7 @@
           <p:cNvPr id="16" name="">
             <a:extLst xmlns:a="http://schemas.openxmlformats.org/drawingml/2006/main">
               <a:ext uri="{FF2B5EF4-FFF2-40B4-BE49-F238E27FC236}">
-                <a16:creationId xmlns:a16="http://schemas.microsoft.com/office/drawing/2014/main" id="{B7F13968-D920-48A0-9802-1FD38F3C3CC9}"/>
+                <a16:creationId xmlns:a16="http://schemas.microsoft.com/office/drawing/2014/main" id="{E78987B8-154E-4B86-843D-56E173C995E9}"/>
               </a:ext>
             </a:extLst>
           </p:cNvPr>
@@ -10996,7 +11004,7 @@
           <p:cNvPr id="2" name="">
             <a:extLst xmlns:a="http://schemas.openxmlformats.org/drawingml/2006/main">
               <a:ext uri="{FF2B5EF4-FFF2-40B4-BE49-F238E27FC236}">
-                <a16:creationId xmlns:a16="http://schemas.microsoft.com/office/drawing/2014/main" id="{87C89C1A-F032-4B9E-9492-2BED6E9CEE4A}"/>
+                <a16:creationId xmlns:a16="http://schemas.microsoft.com/office/drawing/2014/main" id="{73C0FBDD-0357-482A-A3DA-64CAB907582C}"/>
               </a:ext>
             </a:extLst>
           </p:cNvPr>
@@ -11053,7 +11061,7 @@
           <p:cNvPr id="3" name="">
             <a:extLst xmlns:a="http://schemas.openxmlformats.org/drawingml/2006/main">
               <a:ext uri="{FF2B5EF4-FFF2-40B4-BE49-F238E27FC236}">
-                <a16:creationId xmlns:a16="http://schemas.microsoft.com/office/drawing/2014/main" id="{A2A3EE7E-51EC-47DA-AB27-F7FB4DA3C740}"/>
+                <a16:creationId xmlns:a16="http://schemas.microsoft.com/office/drawing/2014/main" id="{C270F10E-8B5A-4066-82E2-0706347F1C34}"/>
               </a:ext>
             </a:extLst>
           </p:cNvPr>
@@ -11085,7 +11093,7 @@
           <p:cNvPr id="4" name="">
             <a:extLst xmlns:a="http://schemas.openxmlformats.org/drawingml/2006/main">
               <a:ext uri="{FF2B5EF4-FFF2-40B4-BE49-F238E27FC236}">
-                <a16:creationId xmlns:a16="http://schemas.microsoft.com/office/drawing/2014/main" id="{D82F1C37-2A73-40BD-A51A-CEA5BF2E36AF}"/>
+                <a16:creationId xmlns:a16="http://schemas.microsoft.com/office/drawing/2014/main" id="{78CD1C32-BFDA-4A30-9751-C1677A956BFD}"/>
               </a:ext>
             </a:extLst>
           </p:cNvPr>
@@ -11142,7 +11150,7 @@
           <p:cNvPr id="5" name="">
             <a:extLst xmlns:a="http://schemas.openxmlformats.org/drawingml/2006/main">
               <a:ext uri="{FF2B5EF4-FFF2-40B4-BE49-F238E27FC236}">
-                <a16:creationId xmlns:a16="http://schemas.microsoft.com/office/drawing/2014/main" id="{1CE41ACC-558D-4460-B011-1604861BFCBB}"/>
+                <a16:creationId xmlns:a16="http://schemas.microsoft.com/office/drawing/2014/main" id="{974B0996-4833-432B-B129-4441997971AA}"/>
               </a:ext>
             </a:extLst>
           </p:cNvPr>
@@ -11199,7 +11207,7 @@
           <p:cNvPr id="6" name="">
             <a:extLst xmlns:a="http://schemas.openxmlformats.org/drawingml/2006/main">
               <a:ext uri="{FF2B5EF4-FFF2-40B4-BE49-F238E27FC236}">
-                <a16:creationId xmlns:a16="http://schemas.microsoft.com/office/drawing/2014/main" id="{378D17E1-29C2-45E1-9204-05D9C50B10C5}"/>
+                <a16:creationId xmlns:a16="http://schemas.microsoft.com/office/drawing/2014/main" id="{B79851FF-FD37-48BD-B75E-D429E551E18A}"/>
               </a:ext>
             </a:extLst>
           </p:cNvPr>
@@ -11256,7 +11264,7 @@
           <p:cNvPr id="7" name="">
             <a:extLst xmlns:a="http://schemas.openxmlformats.org/drawingml/2006/main">
               <a:ext uri="{FF2B5EF4-FFF2-40B4-BE49-F238E27FC236}">
-                <a16:creationId xmlns:a16="http://schemas.microsoft.com/office/drawing/2014/main" id="{642CB3D6-A246-44CF-BEE7-6F56BDA01B20}"/>
+                <a16:creationId xmlns:a16="http://schemas.microsoft.com/office/drawing/2014/main" id="{B3747B39-D1B8-4BD0-A24C-B8AEC996B56E}"/>
               </a:ext>
             </a:extLst>
           </p:cNvPr>
@@ -11288,7 +11296,7 @@
           <p:cNvPr id="8" name="">
             <a:extLst xmlns:a="http://schemas.openxmlformats.org/drawingml/2006/main">
               <a:ext uri="{FF2B5EF4-FFF2-40B4-BE49-F238E27FC236}">
-                <a16:creationId xmlns:a16="http://schemas.microsoft.com/office/drawing/2014/main" id="{8ADB59AB-98FB-4CFA-970A-7DC64B97E8AE}"/>
+                <a16:creationId xmlns:a16="http://schemas.microsoft.com/office/drawing/2014/main" id="{18928B16-DDA3-4CDF-89BB-4A2F640713F7}"/>
               </a:ext>
             </a:extLst>
           </p:cNvPr>
@@ -11345,7 +11353,7 @@
           <p:cNvPr id="9" name="">
             <a:extLst xmlns:a="http://schemas.openxmlformats.org/drawingml/2006/main">
               <a:ext uri="{FF2B5EF4-FFF2-40B4-BE49-F238E27FC236}">
-                <a16:creationId xmlns:a16="http://schemas.microsoft.com/office/drawing/2014/main" id="{D0BCE066-A83B-4FA8-97EA-5DB6D0C07DA3}"/>
+                <a16:creationId xmlns:a16="http://schemas.microsoft.com/office/drawing/2014/main" id="{F55F29F7-8751-4CC8-8FE7-08B27C3C8432}"/>
               </a:ext>
             </a:extLst>
           </p:cNvPr>
@@ -11406,7 +11414,7 @@
           <p:nvPr/>
         </p:nvPicPr>
         <p:blipFill>
-          <a:blip xmlns:r="http://schemas.openxmlformats.org/officeDocument/2006/relationships" xmlns:a="http://schemas.openxmlformats.org/drawingml/2006/main" r:embed="Re8bcdfe223c34579"/>
+          <a:blip xmlns:r="http://schemas.openxmlformats.org/officeDocument/2006/relationships" xmlns:a="http://schemas.openxmlformats.org/drawingml/2006/main" r:embed="R0125062eed53424e"/>
           <a:stretch xmlns:a="http://schemas.openxmlformats.org/drawingml/2006/main"/>
         </p:blipFill>
         <p:spPr>
@@ -11424,7 +11432,7 @@
           <p:cNvPr id="11" name="">
             <a:extLst xmlns:a="http://schemas.openxmlformats.org/drawingml/2006/main">
               <a:ext uri="{FF2B5EF4-FFF2-40B4-BE49-F238E27FC236}">
-                <a16:creationId xmlns:a16="http://schemas.microsoft.com/office/drawing/2014/main" id="{59748313-E3DA-48A8-B352-D505C03846CB}"/>
+                <a16:creationId xmlns:a16="http://schemas.microsoft.com/office/drawing/2014/main" id="{26D26951-FD3D-486C-A414-D4B189433908}"/>
               </a:ext>
             </a:extLst>
           </p:cNvPr>
@@ -11481,7 +11489,7 @@
           <p:cNvPr id="12" name="">
             <a:extLst xmlns:a="http://schemas.openxmlformats.org/drawingml/2006/main">
               <a:ext uri="{FF2B5EF4-FFF2-40B4-BE49-F238E27FC236}">
-                <a16:creationId xmlns:a16="http://schemas.microsoft.com/office/drawing/2014/main" id="{B3AD58BE-F1C1-4584-B45F-248A04739955}"/>
+                <a16:creationId xmlns:a16="http://schemas.microsoft.com/office/drawing/2014/main" id="{EAA5CE25-B44D-41E3-92B9-36A977A22772}"/>
               </a:ext>
             </a:extLst>
           </p:cNvPr>
@@ -11538,7 +11546,7 @@
           <p:cNvPr id="13" name="">
             <a:extLst xmlns:a="http://schemas.openxmlformats.org/drawingml/2006/main">
               <a:ext uri="{FF2B5EF4-FFF2-40B4-BE49-F238E27FC236}">
-                <a16:creationId xmlns:a16="http://schemas.microsoft.com/office/drawing/2014/main" id="{5437056B-9E70-451D-8BF5-798C079C437D}"/>
+                <a16:creationId xmlns:a16="http://schemas.microsoft.com/office/drawing/2014/main" id="{966A421C-024C-444C-8352-1A520C52E7FA}"/>
               </a:ext>
             </a:extLst>
           </p:cNvPr>
@@ -11570,7 +11578,7 @@
           <p:cNvPr id="14" name="">
             <a:extLst xmlns:a="http://schemas.openxmlformats.org/drawingml/2006/main">
               <a:ext uri="{FF2B5EF4-FFF2-40B4-BE49-F238E27FC236}">
-                <a16:creationId xmlns:a16="http://schemas.microsoft.com/office/drawing/2014/main" id="{414BDB4F-96E1-40CD-B1F3-B944FDE21DBF}"/>
+                <a16:creationId xmlns:a16="http://schemas.microsoft.com/office/drawing/2014/main" id="{4325F177-4AAF-4BD5-A3BE-194F9D8F17C1}"/>
               </a:ext>
             </a:extLst>
           </p:cNvPr>
@@ -11627,7 +11635,7 @@
           <p:cNvPr id="15" name="">
             <a:extLst xmlns:a="http://schemas.openxmlformats.org/drawingml/2006/main">
               <a:ext uri="{FF2B5EF4-FFF2-40B4-BE49-F238E27FC236}">
-                <a16:creationId xmlns:a16="http://schemas.microsoft.com/office/drawing/2014/main" id="{3EE6C2A2-C90F-4642-8765-B7BBBE178089}"/>
+                <a16:creationId xmlns:a16="http://schemas.microsoft.com/office/drawing/2014/main" id="{0521DCB7-F8DC-444A-8BDF-2D026ED7CBCA}"/>
               </a:ext>
             </a:extLst>
           </p:cNvPr>
@@ -11682,7 +11690,7 @@
     </p:spTree>
     <p:extLst>
       <p:ext uri="{BB962C8B-B14F-4D97-AF65-F5344CB8AC3E}">
-        <p14:creationId xmlns:p14="http://schemas.microsoft.com/office/powerpoint/2010/main" val="695429205"/>
+        <p14:creationId xmlns:p14="http://schemas.microsoft.com/office/powerpoint/2010/main" val="1312539153"/>
       </p:ext>
     </p:extLst>
   </p:cSld>
@@ -11837,7 +11845,7 @@
           <p:cNvPr id="23" name="">
             <a:extLst xmlns:a="http://schemas.openxmlformats.org/drawingml/2006/main">
               <a:ext uri="{FF2B5EF4-FFF2-40B4-BE49-F238E27FC236}">
-                <a16:creationId xmlns:a16="http://schemas.microsoft.com/office/drawing/2014/main" id="{E49F33E1-D29E-44E1-AFEF-D6B98ACA0218}"/>
+                <a16:creationId xmlns:a16="http://schemas.microsoft.com/office/drawing/2014/main" id="{E32E87A3-08E8-4BD1-9C6A-BA8DC288EB9C}"/>
               </a:ext>
             </a:extLst>
           </p:cNvPr>
@@ -11869,7 +11877,7 @@
           <p:cNvPr id="2" name="">
             <a:extLst xmlns:a="http://schemas.openxmlformats.org/drawingml/2006/main">
               <a:ext uri="{FF2B5EF4-FFF2-40B4-BE49-F238E27FC236}">
-                <a16:creationId xmlns:a16="http://schemas.microsoft.com/office/drawing/2014/main" id="{FCAB0955-187F-4500-8FDF-D51D962B7CC5}"/>
+                <a16:creationId xmlns:a16="http://schemas.microsoft.com/office/drawing/2014/main" id="{8E5A3E1F-6ECF-497C-820D-2F782992DD29}"/>
               </a:ext>
             </a:extLst>
           </p:cNvPr>
@@ -11926,7 +11934,7 @@
           <p:cNvPr id="3" name="">
             <a:extLst xmlns:a="http://schemas.openxmlformats.org/drawingml/2006/main">
               <a:ext uri="{FF2B5EF4-FFF2-40B4-BE49-F238E27FC236}">
-                <a16:creationId xmlns:a16="http://schemas.microsoft.com/office/drawing/2014/main" id="{225317A6-4947-40D0-9C30-B4B44D8EFF4C}"/>
+                <a16:creationId xmlns:a16="http://schemas.microsoft.com/office/drawing/2014/main" id="{0D7A0352-CDBB-4D89-8325-4178681BC47E}"/>
               </a:ext>
             </a:extLst>
           </p:cNvPr>
@@ -11958,7 +11966,7 @@
           <p:cNvPr id="4" name="">
             <a:extLst xmlns:a="http://schemas.openxmlformats.org/drawingml/2006/main">
               <a:ext uri="{FF2B5EF4-FFF2-40B4-BE49-F238E27FC236}">
-                <a16:creationId xmlns:a16="http://schemas.microsoft.com/office/drawing/2014/main" id="{A972E318-F893-468D-B8C6-58BA307E60FD}"/>
+                <a16:creationId xmlns:a16="http://schemas.microsoft.com/office/drawing/2014/main" id="{57D97383-A79B-4966-81F3-938A2950ACD4}"/>
               </a:ext>
             </a:extLst>
           </p:cNvPr>
@@ -12015,7 +12023,7 @@
           <p:cNvPr id="5" name="">
             <a:extLst xmlns:a="http://schemas.openxmlformats.org/drawingml/2006/main">
               <a:ext uri="{FF2B5EF4-FFF2-40B4-BE49-F238E27FC236}">
-                <a16:creationId xmlns:a16="http://schemas.microsoft.com/office/drawing/2014/main" id="{00948EE2-09CB-444C-AF08-32DB29FDFB36}"/>
+                <a16:creationId xmlns:a16="http://schemas.microsoft.com/office/drawing/2014/main" id="{AD30EF18-05AC-4087-88AF-E24CC745AEC6}"/>
               </a:ext>
             </a:extLst>
           </p:cNvPr>
@@ -12072,7 +12080,7 @@
           <p:cNvPr id="6" name="">
             <a:extLst xmlns:a="http://schemas.openxmlformats.org/drawingml/2006/main">
               <a:ext uri="{FF2B5EF4-FFF2-40B4-BE49-F238E27FC236}">
-                <a16:creationId xmlns:a16="http://schemas.microsoft.com/office/drawing/2014/main" id="{CCCFB3C6-D44B-4F05-A446-FEC771F0CACE}"/>
+                <a16:creationId xmlns:a16="http://schemas.microsoft.com/office/drawing/2014/main" id="{B7BCBF17-6F3E-46A6-B2D7-3B4BB2FEC264}"/>
               </a:ext>
             </a:extLst>
           </p:cNvPr>
@@ -12129,7 +12137,7 @@
           <p:cNvPr id="7" name="">
             <a:extLst xmlns:a="http://schemas.openxmlformats.org/drawingml/2006/main">
               <a:ext uri="{FF2B5EF4-FFF2-40B4-BE49-F238E27FC236}">
-                <a16:creationId xmlns:a16="http://schemas.microsoft.com/office/drawing/2014/main" id="{07E35CE3-2394-43A3-B0FB-1004D5EA6AB5}"/>
+                <a16:creationId xmlns:a16="http://schemas.microsoft.com/office/drawing/2014/main" id="{925C5F33-3226-478B-B84B-650B3A1B7AB9}"/>
               </a:ext>
             </a:extLst>
           </p:cNvPr>
@@ -12161,7 +12169,7 @@
           <p:cNvPr id="8" name="">
             <a:extLst xmlns:a="http://schemas.openxmlformats.org/drawingml/2006/main">
               <a:ext uri="{FF2B5EF4-FFF2-40B4-BE49-F238E27FC236}">
-                <a16:creationId xmlns:a16="http://schemas.microsoft.com/office/drawing/2014/main" id="{0D05E4EE-7261-4CEE-9DAE-448934453D23}"/>
+                <a16:creationId xmlns:a16="http://schemas.microsoft.com/office/drawing/2014/main" id="{ED4DB58B-911C-45DB-9118-F5D28F988B15}"/>
               </a:ext>
             </a:extLst>
           </p:cNvPr>
@@ -12218,7 +12226,7 @@
           <p:cNvPr id="9" name="">
             <a:extLst xmlns:a="http://schemas.openxmlformats.org/drawingml/2006/main">
               <a:ext uri="{FF2B5EF4-FFF2-40B4-BE49-F238E27FC236}">
-                <a16:creationId xmlns:a16="http://schemas.microsoft.com/office/drawing/2014/main" id="{CF452B74-F784-4304-B692-D04D7F137BCB}"/>
+                <a16:creationId xmlns:a16="http://schemas.microsoft.com/office/drawing/2014/main" id="{F70CFC9D-7EF4-4626-86B9-8CAF67F82155}"/>
               </a:ext>
             </a:extLst>
           </p:cNvPr>
@@ -12275,7 +12283,7 @@
           <p:cNvPr id="10" name="">
             <a:extLst xmlns:a="http://schemas.openxmlformats.org/drawingml/2006/main">
               <a:ext uri="{FF2B5EF4-FFF2-40B4-BE49-F238E27FC236}">
-                <a16:creationId xmlns:a16="http://schemas.microsoft.com/office/drawing/2014/main" id="{B538E59B-AFCB-46C9-9347-96F6D66024D5}"/>
+                <a16:creationId xmlns:a16="http://schemas.microsoft.com/office/drawing/2014/main" id="{D8DE3F5E-003A-4E92-86B7-365F7CAA805D}"/>
               </a:ext>
             </a:extLst>
           </p:cNvPr>
@@ -12309,7 +12317,7 @@
           <p:cNvPr id="11" name="">
             <a:extLst xmlns:a="http://schemas.openxmlformats.org/drawingml/2006/main">
               <a:ext uri="{FF2B5EF4-FFF2-40B4-BE49-F238E27FC236}">
-                <a16:creationId xmlns:a16="http://schemas.microsoft.com/office/drawing/2014/main" id="{1DA941AD-881B-4223-98E2-566348AF5037}"/>
+                <a16:creationId xmlns:a16="http://schemas.microsoft.com/office/drawing/2014/main" id="{BBB78DB5-BDF8-48A0-881E-F7234EB419F4}"/>
               </a:ext>
             </a:extLst>
           </p:cNvPr>
@@ -12341,7 +12349,7 @@
           <p:cNvPr id="12" name="">
             <a:extLst xmlns:a="http://schemas.openxmlformats.org/drawingml/2006/main">
               <a:ext uri="{FF2B5EF4-FFF2-40B4-BE49-F238E27FC236}">
-                <a16:creationId xmlns:a16="http://schemas.microsoft.com/office/drawing/2014/main" id="{BB612F34-BF24-4999-A38F-9C1966D463AD}"/>
+                <a16:creationId xmlns:a16="http://schemas.microsoft.com/office/drawing/2014/main" id="{D87BA6D0-B40B-43E2-BEC8-F93B72861BB2}"/>
               </a:ext>
             </a:extLst>
           </p:cNvPr>
@@ -12398,7 +12406,7 @@
           <p:cNvPr id="13" name="">
             <a:extLst xmlns:a="http://schemas.openxmlformats.org/drawingml/2006/main">
               <a:ext uri="{FF2B5EF4-FFF2-40B4-BE49-F238E27FC236}">
-                <a16:creationId xmlns:a16="http://schemas.microsoft.com/office/drawing/2014/main" id="{7D7701CE-EDA8-42CC-B0B0-40A4A6403009}"/>
+                <a16:creationId xmlns:a16="http://schemas.microsoft.com/office/drawing/2014/main" id="{AB3A4366-7B9C-43A3-8955-0F0B24442267}"/>
               </a:ext>
             </a:extLst>
           </p:cNvPr>
@@ -12455,7 +12463,7 @@
           <p:cNvPr id="14" name="">
             <a:extLst xmlns:a="http://schemas.openxmlformats.org/drawingml/2006/main">
               <a:ext uri="{FF2B5EF4-FFF2-40B4-BE49-F238E27FC236}">
-                <a16:creationId xmlns:a16="http://schemas.microsoft.com/office/drawing/2014/main" id="{EF2DA2B9-1E10-4783-96BC-DE0539421F4E}"/>
+                <a16:creationId xmlns:a16="http://schemas.microsoft.com/office/drawing/2014/main" id="{F75B8ED8-AB4E-491F-A366-423497C60B1C}"/>
               </a:ext>
             </a:extLst>
           </p:cNvPr>
@@ -12489,7 +12497,7 @@
           <p:cNvPr id="15" name="">
             <a:extLst xmlns:a="http://schemas.openxmlformats.org/drawingml/2006/main">
               <a:ext uri="{FF2B5EF4-FFF2-40B4-BE49-F238E27FC236}">
-                <a16:creationId xmlns:a16="http://schemas.microsoft.com/office/drawing/2014/main" id="{63D22386-2477-4165-845B-E880C180D87C}"/>
+                <a16:creationId xmlns:a16="http://schemas.microsoft.com/office/drawing/2014/main" id="{F5802CB1-5F60-460D-902B-8AEAFF4CBDB9}"/>
               </a:ext>
             </a:extLst>
           </p:cNvPr>
@@ -12521,7 +12529,7 @@
           <p:cNvPr id="16" name="">
             <a:extLst xmlns:a="http://schemas.openxmlformats.org/drawingml/2006/main">
               <a:ext uri="{FF2B5EF4-FFF2-40B4-BE49-F238E27FC236}">
-                <a16:creationId xmlns:a16="http://schemas.microsoft.com/office/drawing/2014/main" id="{1788D65D-A718-4F2F-9404-802D1002375F}"/>
+                <a16:creationId xmlns:a16="http://schemas.microsoft.com/office/drawing/2014/main" id="{AB940203-5684-4C7E-8FC9-0160BBC3D0F5}"/>
               </a:ext>
             </a:extLst>
           </p:cNvPr>
@@ -12578,7 +12586,7 @@
           <p:cNvPr id="17" name="">
             <a:extLst xmlns:a="http://schemas.openxmlformats.org/drawingml/2006/main">
               <a:ext uri="{FF2B5EF4-FFF2-40B4-BE49-F238E27FC236}">
-                <a16:creationId xmlns:a16="http://schemas.microsoft.com/office/drawing/2014/main" id="{1FFEE346-9617-4FD5-BC81-6E5D8A632AE2}"/>
+                <a16:creationId xmlns:a16="http://schemas.microsoft.com/office/drawing/2014/main" id="{5AA047F8-1815-4A22-B601-47DD4C10DC18}"/>
               </a:ext>
             </a:extLst>
           </p:cNvPr>
@@ -12635,7 +12643,7 @@
           <p:cNvPr id="18" name="">
             <a:extLst xmlns:a="http://schemas.openxmlformats.org/drawingml/2006/main">
               <a:ext uri="{FF2B5EF4-FFF2-40B4-BE49-F238E27FC236}">
-                <a16:creationId xmlns:a16="http://schemas.microsoft.com/office/drawing/2014/main" id="{BCDF8DBA-88C3-45DB-9112-14ECF553134C}"/>
+                <a16:creationId xmlns:a16="http://schemas.microsoft.com/office/drawing/2014/main" id="{EEF50455-FB4A-46B9-8681-3970C31D7557}"/>
               </a:ext>
             </a:extLst>
           </p:cNvPr>
@@ -12669,7 +12677,7 @@
           <p:cNvPr id="19" name="">
             <a:extLst xmlns:a="http://schemas.openxmlformats.org/drawingml/2006/main">
               <a:ext uri="{FF2B5EF4-FFF2-40B4-BE49-F238E27FC236}">
-                <a16:creationId xmlns:a16="http://schemas.microsoft.com/office/drawing/2014/main" id="{74E41EF0-B95A-4878-9F6D-98CFF463201D}"/>
+                <a16:creationId xmlns:a16="http://schemas.microsoft.com/office/drawing/2014/main" id="{30FA2BD8-AE8B-40E8-8981-B7FDB7AE7155}"/>
               </a:ext>
             </a:extLst>
           </p:cNvPr>
@@ -12701,7 +12709,7 @@
           <p:cNvPr id="20" name="">
             <a:extLst xmlns:a="http://schemas.openxmlformats.org/drawingml/2006/main">
               <a:ext uri="{FF2B5EF4-FFF2-40B4-BE49-F238E27FC236}">
-                <a16:creationId xmlns:a16="http://schemas.microsoft.com/office/drawing/2014/main" id="{AA56C6D4-6C38-4B51-9EF4-8AAAB9C5E5BB}"/>
+                <a16:creationId xmlns:a16="http://schemas.microsoft.com/office/drawing/2014/main" id="{AF790401-26B4-4DE9-9D36-946F998F3F1E}"/>
               </a:ext>
             </a:extLst>
           </p:cNvPr>
@@ -12758,7 +12766,7 @@
           <p:cNvPr id="21" name="">
             <a:extLst xmlns:a="http://schemas.openxmlformats.org/drawingml/2006/main">
               <a:ext uri="{FF2B5EF4-FFF2-40B4-BE49-F238E27FC236}">
-                <a16:creationId xmlns:a16="http://schemas.microsoft.com/office/drawing/2014/main" id="{AC298E11-5801-4E3C-988A-764369E4648E}"/>
+                <a16:creationId xmlns:a16="http://schemas.microsoft.com/office/drawing/2014/main" id="{C9BB9152-0226-4291-9044-07B2BA757F08}"/>
               </a:ext>
             </a:extLst>
           </p:cNvPr>
@@ -12815,7 +12823,7 @@
           <p:cNvPr id="22" name="">
             <a:extLst xmlns:a="http://schemas.openxmlformats.org/drawingml/2006/main">
               <a:ext uri="{FF2B5EF4-FFF2-40B4-BE49-F238E27FC236}">
-                <a16:creationId xmlns:a16="http://schemas.microsoft.com/office/drawing/2014/main" id="{3A41A380-A049-48BD-9BC1-0046595EBA80}"/>
+                <a16:creationId xmlns:a16="http://schemas.microsoft.com/office/drawing/2014/main" id="{BB107828-61FA-4382-897F-5D52FE2A7CBE}"/>
               </a:ext>
             </a:extLst>
           </p:cNvPr>
@@ -12870,7 +12878,7 @@
     </p:spTree>
     <p:extLst>
       <p:ext uri="{BB962C8B-B14F-4D97-AF65-F5344CB8AC3E}">
-        <p14:creationId xmlns:p14="http://schemas.microsoft.com/office/powerpoint/2010/main" val="1393962778"/>
+        <p14:creationId xmlns:p14="http://schemas.microsoft.com/office/powerpoint/2010/main" val="1907104377"/>
       </p:ext>
     </p:extLst>
   </p:cSld>
@@ -13071,7 +13079,7 @@
           <p:cNvPr id="22" name="">
             <a:extLst xmlns:a="http://schemas.openxmlformats.org/drawingml/2006/main">
               <a:ext uri="{FF2B5EF4-FFF2-40B4-BE49-F238E27FC236}">
-                <a16:creationId xmlns:a16="http://schemas.microsoft.com/office/drawing/2014/main" id="{20C1B908-A570-4887-865D-23364071A1AF}"/>
+                <a16:creationId xmlns:a16="http://schemas.microsoft.com/office/drawing/2014/main" id="{24EB15B4-CEE1-481F-9C31-7C86DFD0779F}"/>
               </a:ext>
             </a:extLst>
           </p:cNvPr>
@@ -13103,7 +13111,7 @@
           <p:cNvPr id="2" name="">
             <a:extLst xmlns:a="http://schemas.openxmlformats.org/drawingml/2006/main">
               <a:ext uri="{FF2B5EF4-FFF2-40B4-BE49-F238E27FC236}">
-                <a16:creationId xmlns:a16="http://schemas.microsoft.com/office/drawing/2014/main" id="{2C1258FD-19CA-4745-A1C8-C246AEF60602}"/>
+                <a16:creationId xmlns:a16="http://schemas.microsoft.com/office/drawing/2014/main" id="{30E33A53-4D68-4153-AF95-679415053F10}"/>
               </a:ext>
             </a:extLst>
           </p:cNvPr>
@@ -13160,7 +13168,7 @@
           <p:cNvPr id="3" name="">
             <a:extLst xmlns:a="http://schemas.openxmlformats.org/drawingml/2006/main">
               <a:ext uri="{FF2B5EF4-FFF2-40B4-BE49-F238E27FC236}">
-                <a16:creationId xmlns:a16="http://schemas.microsoft.com/office/drawing/2014/main" id="{246C06E2-89DF-4EE7-9D69-3BA638345CA3}"/>
+                <a16:creationId xmlns:a16="http://schemas.microsoft.com/office/drawing/2014/main" id="{D9EB0F62-D3DD-4EF2-AEC8-2F63ED68634B}"/>
               </a:ext>
             </a:extLst>
           </p:cNvPr>
@@ -13192,7 +13200,7 @@
           <p:cNvPr id="4" name="">
             <a:extLst xmlns:a="http://schemas.openxmlformats.org/drawingml/2006/main">
               <a:ext uri="{FF2B5EF4-FFF2-40B4-BE49-F238E27FC236}">
-                <a16:creationId xmlns:a16="http://schemas.microsoft.com/office/drawing/2014/main" id="{8C1351A2-7609-4F11-8211-CBEF7694DBF0}"/>
+                <a16:creationId xmlns:a16="http://schemas.microsoft.com/office/drawing/2014/main" id="{12E21D46-4EBF-4212-9A18-A7C6E774AB72}"/>
               </a:ext>
             </a:extLst>
           </p:cNvPr>
@@ -13249,7 +13257,7 @@
           <p:cNvPr id="5" name="">
             <a:extLst xmlns:a="http://schemas.openxmlformats.org/drawingml/2006/main">
               <a:ext uri="{FF2B5EF4-FFF2-40B4-BE49-F238E27FC236}">
-                <a16:creationId xmlns:a16="http://schemas.microsoft.com/office/drawing/2014/main" id="{E778B9DF-CF87-452D-9A94-6593CBD269FF}"/>
+                <a16:creationId xmlns:a16="http://schemas.microsoft.com/office/drawing/2014/main" id="{005E8B60-DC43-4898-AACB-34CFBB8EFA1B}"/>
               </a:ext>
             </a:extLst>
           </p:cNvPr>
@@ -13306,7 +13314,7 @@
           <p:cNvPr id="6" name="">
             <a:extLst xmlns:a="http://schemas.openxmlformats.org/drawingml/2006/main">
               <a:ext uri="{FF2B5EF4-FFF2-40B4-BE49-F238E27FC236}">
-                <a16:creationId xmlns:a16="http://schemas.microsoft.com/office/drawing/2014/main" id="{F30F57B7-F02C-4FB3-8FB5-AF3110E12427}"/>
+                <a16:creationId xmlns:a16="http://schemas.microsoft.com/office/drawing/2014/main" id="{9F903228-75A1-4EBC-8ED3-9BE43FC58C03}"/>
               </a:ext>
             </a:extLst>
           </p:cNvPr>
@@ -13363,7 +13371,7 @@
           <p:cNvPr id="7" name="">
             <a:extLst xmlns:a="http://schemas.openxmlformats.org/drawingml/2006/main">
               <a:ext uri="{FF2B5EF4-FFF2-40B4-BE49-F238E27FC236}">
-                <a16:creationId xmlns:a16="http://schemas.microsoft.com/office/drawing/2014/main" id="{9F01CC2E-E0FE-4601-B90C-BA71083DF6B6}"/>
+                <a16:creationId xmlns:a16="http://schemas.microsoft.com/office/drawing/2014/main" id="{EB3228A2-6AF9-4B92-B4AE-1E5782B4448D}"/>
               </a:ext>
             </a:extLst>
           </p:cNvPr>
@@ -13395,7 +13403,7 @@
           <p:cNvPr id="8" name="">
             <a:extLst xmlns:a="http://schemas.openxmlformats.org/drawingml/2006/main">
               <a:ext uri="{FF2B5EF4-FFF2-40B4-BE49-F238E27FC236}">
-                <a16:creationId xmlns:a16="http://schemas.microsoft.com/office/drawing/2014/main" id="{E842041A-EFDF-47E3-9C22-3045C18060D1}"/>
+                <a16:creationId xmlns:a16="http://schemas.microsoft.com/office/drawing/2014/main" id="{F446E0B4-AC1F-4AC5-A7ED-DFD88AA387FF}"/>
               </a:ext>
             </a:extLst>
           </p:cNvPr>
@@ -13452,7 +13460,7 @@
           <p:cNvPr id="9" name="">
             <a:extLst xmlns:a="http://schemas.openxmlformats.org/drawingml/2006/main">
               <a:ext uri="{FF2B5EF4-FFF2-40B4-BE49-F238E27FC236}">
-                <a16:creationId xmlns:a16="http://schemas.microsoft.com/office/drawing/2014/main" id="{627F4D8B-E18F-42C8-9AF4-03655DC75096}"/>
+                <a16:creationId xmlns:a16="http://schemas.microsoft.com/office/drawing/2014/main" id="{8065D101-2D1C-46BD-8B9F-0B0C8CE4BE30}"/>
               </a:ext>
             </a:extLst>
           </p:cNvPr>
@@ -13509,7 +13517,7 @@
           <p:cNvPr id="10" name="">
             <a:extLst xmlns:a="http://schemas.openxmlformats.org/drawingml/2006/main">
               <a:ext uri="{FF2B5EF4-FFF2-40B4-BE49-F238E27FC236}">
-                <a16:creationId xmlns:a16="http://schemas.microsoft.com/office/drawing/2014/main" id="{E802A429-6F94-4EB9-8AF5-1AC4E18965BE}"/>
+                <a16:creationId xmlns:a16="http://schemas.microsoft.com/office/drawing/2014/main" id="{EC5EA078-2FAF-4ACF-800B-ABD350266549}"/>
               </a:ext>
             </a:extLst>
           </p:cNvPr>
@@ -13543,7 +13551,7 @@
           <p:cNvPr id="11" name="">
             <a:extLst xmlns:a="http://schemas.openxmlformats.org/drawingml/2006/main">
               <a:ext uri="{FF2B5EF4-FFF2-40B4-BE49-F238E27FC236}">
-                <a16:creationId xmlns:a16="http://schemas.microsoft.com/office/drawing/2014/main" id="{C577E6AB-1C13-494E-82AD-AD75758C9435}"/>
+                <a16:creationId xmlns:a16="http://schemas.microsoft.com/office/drawing/2014/main" id="{169BCC38-5EAB-41A4-B751-4C9C9008C350}"/>
               </a:ext>
             </a:extLst>
           </p:cNvPr>
@@ -13575,7 +13583,7 @@
           <p:cNvPr id="12" name="">
             <a:extLst xmlns:a="http://schemas.openxmlformats.org/drawingml/2006/main">
               <a:ext uri="{FF2B5EF4-FFF2-40B4-BE49-F238E27FC236}">
-                <a16:creationId xmlns:a16="http://schemas.microsoft.com/office/drawing/2014/main" id="{36085D62-2FA2-4E73-97CE-444B72767AD0}"/>
+                <a16:creationId xmlns:a16="http://schemas.microsoft.com/office/drawing/2014/main" id="{1D6EB764-519F-49FB-8F58-EC341A115734}"/>
               </a:ext>
             </a:extLst>
           </p:cNvPr>
@@ -13632,7 +13640,7 @@
           <p:cNvPr id="13" name="">
             <a:extLst xmlns:a="http://schemas.openxmlformats.org/drawingml/2006/main">
               <a:ext uri="{FF2B5EF4-FFF2-40B4-BE49-F238E27FC236}">
-                <a16:creationId xmlns:a16="http://schemas.microsoft.com/office/drawing/2014/main" id="{BDFCC4CF-ED96-4CBF-A809-2C2E0D7EFCE7}"/>
+                <a16:creationId xmlns:a16="http://schemas.microsoft.com/office/drawing/2014/main" id="{70577D54-F587-438C-AD03-1093D36403EB}"/>
               </a:ext>
             </a:extLst>
           </p:cNvPr>
@@ -13689,7 +13697,7 @@
           <p:cNvPr id="14" name="">
             <a:extLst xmlns:a="http://schemas.openxmlformats.org/drawingml/2006/main">
               <a:ext uri="{FF2B5EF4-FFF2-40B4-BE49-F238E27FC236}">
-                <a16:creationId xmlns:a16="http://schemas.microsoft.com/office/drawing/2014/main" id="{435DA987-7E22-416A-9BEB-42D5DFB17E7D}"/>
+                <a16:creationId xmlns:a16="http://schemas.microsoft.com/office/drawing/2014/main" id="{3DD64705-62D4-4288-988D-22CE45E123E7}"/>
               </a:ext>
             </a:extLst>
           </p:cNvPr>
@@ -13723,7 +13731,7 @@
           <p:cNvPr id="15" name="">
             <a:extLst xmlns:a="http://schemas.openxmlformats.org/drawingml/2006/main">
               <a:ext uri="{FF2B5EF4-FFF2-40B4-BE49-F238E27FC236}">
-                <a16:creationId xmlns:a16="http://schemas.microsoft.com/office/drawing/2014/main" id="{6F2BEC8E-12EC-4BB9-91E5-AE0576B3B337}"/>
+                <a16:creationId xmlns:a16="http://schemas.microsoft.com/office/drawing/2014/main" id="{A813CE7E-C05E-4FF2-8DF2-FFB593C7D02D}"/>
               </a:ext>
             </a:extLst>
           </p:cNvPr>
@@ -13755,7 +13763,7 @@
           <p:cNvPr id="16" name="">
             <a:extLst xmlns:a="http://schemas.openxmlformats.org/drawingml/2006/main">
               <a:ext uri="{FF2B5EF4-FFF2-40B4-BE49-F238E27FC236}">
-                <a16:creationId xmlns:a16="http://schemas.microsoft.com/office/drawing/2014/main" id="{F3EC93FC-CB5E-4017-A15B-94A99C425476}"/>
+                <a16:creationId xmlns:a16="http://schemas.microsoft.com/office/drawing/2014/main" id="{27E244DB-FFA3-44C4-B05D-461DD96C9582}"/>
               </a:ext>
             </a:extLst>
           </p:cNvPr>
@@ -13812,7 +13820,7 @@
           <p:cNvPr id="17" name="">
             <a:extLst xmlns:a="http://schemas.openxmlformats.org/drawingml/2006/main">
               <a:ext uri="{FF2B5EF4-FFF2-40B4-BE49-F238E27FC236}">
-                <a16:creationId xmlns:a16="http://schemas.microsoft.com/office/drawing/2014/main" id="{C7E1583E-1FEE-4E3C-A8AA-7425AFE0AE76}"/>
+                <a16:creationId xmlns:a16="http://schemas.microsoft.com/office/drawing/2014/main" id="{71A8DD12-8F2E-4FED-A3F4-7EA2855A4F85}"/>
               </a:ext>
             </a:extLst>
           </p:cNvPr>
@@ -13869,7 +13877,7 @@
           <p:cNvPr id="18" name="">
             <a:extLst xmlns:a="http://schemas.openxmlformats.org/drawingml/2006/main">
               <a:ext uri="{FF2B5EF4-FFF2-40B4-BE49-F238E27FC236}">
-                <a16:creationId xmlns:a16="http://schemas.microsoft.com/office/drawing/2014/main" id="{89D86448-68C2-474C-99A1-C740664277C2}"/>
+                <a16:creationId xmlns:a16="http://schemas.microsoft.com/office/drawing/2014/main" id="{545172CB-C2F8-4BCC-9D5E-CA2D63C32F8C}"/>
               </a:ext>
             </a:extLst>
           </p:cNvPr>
@@ -13903,7 +13911,7 @@
           <p:cNvPr id="19" name="">
             <a:extLst xmlns:a="http://schemas.openxmlformats.org/drawingml/2006/main">
               <a:ext uri="{FF2B5EF4-FFF2-40B4-BE49-F238E27FC236}">
-                <a16:creationId xmlns:a16="http://schemas.microsoft.com/office/drawing/2014/main" id="{78060010-3FDB-4C9D-89EE-54223537CFE7}"/>
+                <a16:creationId xmlns:a16="http://schemas.microsoft.com/office/drawing/2014/main" id="{0A66C621-B9BB-4A51-B96C-68200298411A}"/>
               </a:ext>
             </a:extLst>
           </p:cNvPr>
@@ -13935,7 +13943,7 @@
           <p:cNvPr id="20" name="">
             <a:extLst xmlns:a="http://schemas.openxmlformats.org/drawingml/2006/main">
               <a:ext uri="{FF2B5EF4-FFF2-40B4-BE49-F238E27FC236}">
-                <a16:creationId xmlns:a16="http://schemas.microsoft.com/office/drawing/2014/main" id="{FB718BF0-1440-491E-8358-E760C873DE5A}"/>
+                <a16:creationId xmlns:a16="http://schemas.microsoft.com/office/drawing/2014/main" id="{500ACFCA-43BE-46A3-8234-E833A9914D33}"/>
               </a:ext>
             </a:extLst>
           </p:cNvPr>
@@ -13992,7 +14000,7 @@
           <p:cNvPr id="21" name="">
             <a:extLst xmlns:a="http://schemas.openxmlformats.org/drawingml/2006/main">
               <a:ext uri="{FF2B5EF4-FFF2-40B4-BE49-F238E27FC236}">
-                <a16:creationId xmlns:a16="http://schemas.microsoft.com/office/drawing/2014/main" id="{C3D8C73A-3A63-4301-8876-92B18CC1CCA7}"/>
+                <a16:creationId xmlns:a16="http://schemas.microsoft.com/office/drawing/2014/main" id="{286FDD7B-3685-4071-A5E9-5836F4D41E27}"/>
               </a:ext>
             </a:extLst>
           </p:cNvPr>
@@ -14047,7 +14055,7 @@
     </p:spTree>
     <p:extLst>
       <p:ext uri="{BB962C8B-B14F-4D97-AF65-F5344CB8AC3E}">
-        <p14:creationId xmlns:p14="http://schemas.microsoft.com/office/powerpoint/2010/main" val="1371108439"/>
+        <p14:creationId xmlns:p14="http://schemas.microsoft.com/office/powerpoint/2010/main" val="1786858921"/>
       </p:ext>
     </p:extLst>
   </p:cSld>
